--- a/docs/pptx/auc3/ritu-auc3-linsubhr-egfrdisc-grade2.pptx
+++ b/docs/pptx/auc3/ritu-auc3-linsubhr-egfrdisc-grade2.pptx
@@ -2443,7 +2443,7 @@
           </p:nvSpPr>
           <p:spPr>
             <a:xfrm>
-              <a:off x="2040316" y="2073503"/>
+              <a:off x="2044638" y="2073503"/>
               <a:ext cx="0" cy="3649639"/>
             </a:xfrm>
             <a:custGeom>
@@ -2486,7 +2486,7 @@
           </p:nvSpPr>
           <p:spPr>
             <a:xfrm>
-              <a:off x="4520982" y="2073503"/>
+              <a:off x="4520586" y="2073503"/>
               <a:ext cx="0" cy="3649639"/>
             </a:xfrm>
             <a:custGeom>
@@ -2529,7 +2529,7 @@
           </p:nvSpPr>
           <p:spPr>
             <a:xfrm>
-              <a:off x="7001648" y="2073503"/>
+              <a:off x="6996534" y="2073503"/>
               <a:ext cx="0" cy="3649639"/>
             </a:xfrm>
             <a:custGeom>
@@ -2787,7 +2787,7 @@
           </p:nvSpPr>
           <p:spPr>
             <a:xfrm>
-              <a:off x="3280649" y="2073503"/>
+              <a:off x="3282612" y="2073503"/>
               <a:ext cx="0" cy="3649639"/>
             </a:xfrm>
             <a:custGeom>
@@ -2830,7 +2830,7 @@
           </p:nvSpPr>
           <p:spPr>
             <a:xfrm>
-              <a:off x="5761315" y="2073503"/>
+              <a:off x="5758560" y="2073503"/>
               <a:ext cx="0" cy="3649639"/>
             </a:xfrm>
             <a:custGeom>
@@ -2873,7 +2873,7 @@
           </p:nvSpPr>
           <p:spPr>
             <a:xfrm>
-              <a:off x="8241981" y="2073503"/>
+              <a:off x="8234508" y="2073503"/>
               <a:ext cx="0" cy="3649639"/>
             </a:xfrm>
             <a:custGeom>
@@ -2917,611 +2917,602 @@
           <p:spPr>
             <a:xfrm>
               <a:off x="1172049" y="2073503"/>
-              <a:ext cx="7090630" cy="3108028"/>
+              <a:ext cx="7090630" cy="3122905"/>
             </a:xfrm>
             <a:custGeom>
               <a:avLst/>
               <a:pathLst>
-                <a:path w="7090630" h="3108028">
+                <a:path w="7090630" h="3122905">
                   <a:moveTo>
-                    <a:pt x="43012" y="0"/>
+                    <a:pt x="271095" y="0"/>
                   </a:moveTo>
                   <a:lnTo>
-                    <a:pt x="71622" y="31565"/>
-                  </a:lnTo>
-                  <a:lnTo>
-                    <a:pt x="143245" y="108817"/>
-                  </a:lnTo>
-                  <a:lnTo>
-                    <a:pt x="214867" y="184340"/>
-                  </a:lnTo>
-                  <a:lnTo>
-                    <a:pt x="286490" y="258173"/>
-                  </a:lnTo>
-                  <a:lnTo>
-                    <a:pt x="358112" y="330354"/>
-                  </a:lnTo>
-                  <a:lnTo>
-                    <a:pt x="429735" y="400919"/>
-                  </a:lnTo>
-                  <a:lnTo>
-                    <a:pt x="501357" y="469906"/>
-                  </a:lnTo>
-                  <a:lnTo>
-                    <a:pt x="572980" y="537348"/>
-                  </a:lnTo>
-                  <a:lnTo>
-                    <a:pt x="644602" y="603282"/>
-                  </a:lnTo>
-                  <a:lnTo>
-                    <a:pt x="716225" y="667740"/>
-                  </a:lnTo>
-                  <a:lnTo>
-                    <a:pt x="787847" y="730756"/>
-                  </a:lnTo>
-                  <a:lnTo>
-                    <a:pt x="859470" y="792361"/>
-                  </a:lnTo>
-                  <a:lnTo>
-                    <a:pt x="931092" y="852588"/>
-                  </a:lnTo>
-                  <a:lnTo>
-                    <a:pt x="1002715" y="911467"/>
-                  </a:lnTo>
-                  <a:lnTo>
-                    <a:pt x="1074337" y="969029"/>
-                  </a:lnTo>
-                  <a:lnTo>
-                    <a:pt x="1145960" y="1025302"/>
-                  </a:lnTo>
-                  <a:lnTo>
-                    <a:pt x="1217582" y="1080317"/>
-                  </a:lnTo>
-                  <a:lnTo>
-                    <a:pt x="1289205" y="1134100"/>
-                  </a:lnTo>
-                  <a:lnTo>
-                    <a:pt x="1360827" y="1186679"/>
-                  </a:lnTo>
-                  <a:lnTo>
-                    <a:pt x="1432450" y="1238082"/>
-                  </a:lnTo>
-                  <a:lnTo>
-                    <a:pt x="1504073" y="1288335"/>
-                  </a:lnTo>
-                  <a:lnTo>
-                    <a:pt x="1575695" y="1337463"/>
-                  </a:lnTo>
-                  <a:lnTo>
-                    <a:pt x="1647318" y="1385492"/>
-                  </a:lnTo>
-                  <a:lnTo>
-                    <a:pt x="1718940" y="1432446"/>
-                  </a:lnTo>
-                  <a:lnTo>
-                    <a:pt x="1790563" y="1478349"/>
-                  </a:lnTo>
-                  <a:lnTo>
-                    <a:pt x="1862185" y="1523225"/>
-                  </a:lnTo>
-                  <a:lnTo>
-                    <a:pt x="1933808" y="1567097"/>
-                  </a:lnTo>
-                  <a:lnTo>
-                    <a:pt x="2005430" y="1609988"/>
-                  </a:lnTo>
-                  <a:lnTo>
-                    <a:pt x="2077053" y="1651918"/>
-                  </a:lnTo>
-                  <a:lnTo>
-                    <a:pt x="2148675" y="1692910"/>
-                  </a:lnTo>
-                  <a:lnTo>
-                    <a:pt x="2220298" y="1732985"/>
-                  </a:lnTo>
-                  <a:lnTo>
-                    <a:pt x="2291920" y="1772163"/>
-                  </a:lnTo>
-                  <a:lnTo>
-                    <a:pt x="2363543" y="1810464"/>
-                  </a:lnTo>
-                  <a:lnTo>
-                    <a:pt x="2435165" y="1847908"/>
-                  </a:lnTo>
-                  <a:lnTo>
-                    <a:pt x="2506788" y="1884514"/>
-                  </a:lnTo>
-                  <a:lnTo>
-                    <a:pt x="2578410" y="1920301"/>
-                  </a:lnTo>
-                  <a:lnTo>
-                    <a:pt x="2650033" y="1955288"/>
-                  </a:lnTo>
-                  <a:lnTo>
-                    <a:pt x="2721655" y="1989491"/>
-                  </a:lnTo>
-                  <a:lnTo>
-                    <a:pt x="2793278" y="2022929"/>
-                  </a:lnTo>
-                  <a:lnTo>
-                    <a:pt x="2864901" y="2055619"/>
-                  </a:lnTo>
-                  <a:lnTo>
-                    <a:pt x="2936523" y="2087577"/>
-                  </a:lnTo>
-                  <a:lnTo>
-                    <a:pt x="3008146" y="2118820"/>
-                  </a:lnTo>
-                  <a:lnTo>
-                    <a:pt x="3079768" y="2149364"/>
-                  </a:lnTo>
-                  <a:lnTo>
-                    <a:pt x="3151391" y="2179224"/>
-                  </a:lnTo>
-                  <a:lnTo>
-                    <a:pt x="3223013" y="2208416"/>
-                  </a:lnTo>
-                  <a:lnTo>
-                    <a:pt x="3294636" y="2236955"/>
-                  </a:lnTo>
-                  <a:lnTo>
-                    <a:pt x="3366258" y="2264855"/>
-                  </a:lnTo>
-                  <a:lnTo>
-                    <a:pt x="3437881" y="2292131"/>
-                  </a:lnTo>
-                  <a:lnTo>
-                    <a:pt x="3509503" y="2318797"/>
-                  </a:lnTo>
-                  <a:lnTo>
-                    <a:pt x="3581126" y="2344866"/>
-                  </a:lnTo>
-                  <a:lnTo>
-                    <a:pt x="3652748" y="2370351"/>
-                  </a:lnTo>
-                  <a:lnTo>
-                    <a:pt x="3724371" y="2395266"/>
-                  </a:lnTo>
-                  <a:lnTo>
-                    <a:pt x="3795993" y="2419624"/>
-                  </a:lnTo>
-                  <a:lnTo>
-                    <a:pt x="3867616" y="2443437"/>
-                  </a:lnTo>
-                  <a:lnTo>
-                    <a:pt x="3939238" y="2466716"/>
-                  </a:lnTo>
-                  <a:lnTo>
-                    <a:pt x="4010861" y="2489475"/>
-                  </a:lnTo>
-                  <a:lnTo>
-                    <a:pt x="4082483" y="2511725"/>
-                  </a:lnTo>
-                  <a:lnTo>
-                    <a:pt x="4154106" y="2533476"/>
-                  </a:lnTo>
-                  <a:lnTo>
-                    <a:pt x="4225729" y="2554741"/>
-                  </a:lnTo>
-                  <a:lnTo>
-                    <a:pt x="4297351" y="2575530"/>
-                  </a:lnTo>
-                  <a:lnTo>
-                    <a:pt x="4368974" y="2595854"/>
-                  </a:lnTo>
-                  <a:lnTo>
-                    <a:pt x="4440596" y="2615723"/>
-                  </a:lnTo>
-                  <a:lnTo>
-                    <a:pt x="4512219" y="2635147"/>
-                  </a:lnTo>
-                  <a:lnTo>
-                    <a:pt x="4583841" y="2654137"/>
-                  </a:lnTo>
-                  <a:lnTo>
-                    <a:pt x="4655464" y="2648764"/>
-                  </a:lnTo>
-                  <a:lnTo>
-                    <a:pt x="4727086" y="2643165"/>
-                  </a:lnTo>
-                  <a:lnTo>
-                    <a:pt x="4798709" y="2637529"/>
-                  </a:lnTo>
-                  <a:lnTo>
-                    <a:pt x="4870331" y="2631855"/>
-                  </a:lnTo>
-                  <a:lnTo>
-                    <a:pt x="4941954" y="2626142"/>
-                  </a:lnTo>
-                  <a:lnTo>
-                    <a:pt x="5013576" y="2620392"/>
-                  </a:lnTo>
-                  <a:lnTo>
-                    <a:pt x="5085199" y="2614602"/>
-                  </a:lnTo>
-                  <a:lnTo>
-                    <a:pt x="5156821" y="2608774"/>
-                  </a:lnTo>
-                  <a:lnTo>
-                    <a:pt x="5228444" y="2602907"/>
-                  </a:lnTo>
-                  <a:lnTo>
-                    <a:pt x="5300066" y="2597001"/>
-                  </a:lnTo>
-                  <a:lnTo>
-                    <a:pt x="5371689" y="2591055"/>
-                  </a:lnTo>
-                  <a:lnTo>
-                    <a:pt x="5443311" y="2585069"/>
-                  </a:lnTo>
-                  <a:lnTo>
-                    <a:pt x="5514934" y="2579043"/>
-                  </a:lnTo>
-                  <a:lnTo>
-                    <a:pt x="5586557" y="2572976"/>
-                  </a:lnTo>
-                  <a:lnTo>
-                    <a:pt x="5658179" y="2566869"/>
-                  </a:lnTo>
-                  <a:lnTo>
-                    <a:pt x="5729802" y="2560721"/>
-                  </a:lnTo>
-                  <a:lnTo>
-                    <a:pt x="5801424" y="2554532"/>
-                  </a:lnTo>
-                  <a:lnTo>
-                    <a:pt x="5873047" y="2548301"/>
-                  </a:lnTo>
-                  <a:lnTo>
-                    <a:pt x="5944669" y="2542028"/>
-                  </a:lnTo>
-                  <a:lnTo>
-                    <a:pt x="6016292" y="2535714"/>
-                  </a:lnTo>
-                  <a:lnTo>
-                    <a:pt x="6087914" y="2529357"/>
-                  </a:lnTo>
-                  <a:lnTo>
-                    <a:pt x="6159537" y="2522957"/>
-                  </a:lnTo>
-                  <a:lnTo>
-                    <a:pt x="6231159" y="2516514"/>
-                  </a:lnTo>
-                  <a:lnTo>
-                    <a:pt x="6302782" y="2510029"/>
-                  </a:lnTo>
-                  <a:lnTo>
-                    <a:pt x="6374404" y="2503500"/>
-                  </a:lnTo>
-                  <a:lnTo>
-                    <a:pt x="6446027" y="2496926"/>
-                  </a:lnTo>
-                  <a:lnTo>
-                    <a:pt x="6517649" y="2490309"/>
-                  </a:lnTo>
-                  <a:lnTo>
-                    <a:pt x="6589272" y="2483648"/>
-                  </a:lnTo>
-                  <a:lnTo>
-                    <a:pt x="6660894" y="2476942"/>
-                  </a:lnTo>
-                  <a:lnTo>
-                    <a:pt x="6732517" y="2470191"/>
-                  </a:lnTo>
-                  <a:lnTo>
-                    <a:pt x="6804139" y="2463394"/>
-                  </a:lnTo>
-                  <a:lnTo>
-                    <a:pt x="6875762" y="2456552"/>
-                  </a:lnTo>
-                  <a:lnTo>
-                    <a:pt x="6947385" y="2449665"/>
-                  </a:lnTo>
-                  <a:lnTo>
-                    <a:pt x="7019007" y="2442731"/>
-                  </a:lnTo>
-                  <a:lnTo>
-                    <a:pt x="7090630" y="2435750"/>
-                  </a:lnTo>
-                  <a:lnTo>
-                    <a:pt x="7090630" y="3108028"/>
-                  </a:lnTo>
-                  <a:lnTo>
-                    <a:pt x="7019007" y="3099428"/>
-                  </a:lnTo>
-                  <a:lnTo>
-                    <a:pt x="6947385" y="3090631"/>
-                  </a:lnTo>
-                  <a:lnTo>
-                    <a:pt x="6875762" y="3081632"/>
-                  </a:lnTo>
-                  <a:lnTo>
-                    <a:pt x="6804139" y="3072428"/>
-                  </a:lnTo>
-                  <a:lnTo>
-                    <a:pt x="6732517" y="3063013"/>
-                  </a:lnTo>
-                  <a:lnTo>
-                    <a:pt x="6660894" y="3053382"/>
-                  </a:lnTo>
-                  <a:lnTo>
-                    <a:pt x="6589272" y="3043531"/>
-                  </a:lnTo>
-                  <a:lnTo>
-                    <a:pt x="6517649" y="3033455"/>
-                  </a:lnTo>
-                  <a:lnTo>
-                    <a:pt x="6446027" y="3023148"/>
-                  </a:lnTo>
-                  <a:lnTo>
-                    <a:pt x="6374404" y="3012605"/>
-                  </a:lnTo>
-                  <a:lnTo>
-                    <a:pt x="6302782" y="3001820"/>
-                  </a:lnTo>
-                  <a:lnTo>
-                    <a:pt x="6231159" y="2990789"/>
-                  </a:lnTo>
-                  <a:lnTo>
-                    <a:pt x="6159537" y="2979505"/>
-                  </a:lnTo>
-                  <a:lnTo>
-                    <a:pt x="6087914" y="2967963"/>
-                  </a:lnTo>
-                  <a:lnTo>
-                    <a:pt x="6016292" y="2956157"/>
-                  </a:lnTo>
-                  <a:lnTo>
-                    <a:pt x="5944669" y="2944080"/>
-                  </a:lnTo>
-                  <a:lnTo>
-                    <a:pt x="5873047" y="2931728"/>
-                  </a:lnTo>
-                  <a:lnTo>
-                    <a:pt x="5801424" y="2919092"/>
-                  </a:lnTo>
-                  <a:lnTo>
-                    <a:pt x="5729802" y="2906167"/>
-                  </a:lnTo>
-                  <a:lnTo>
-                    <a:pt x="5658179" y="2892946"/>
-                  </a:lnTo>
-                  <a:lnTo>
-                    <a:pt x="5586557" y="2879423"/>
-                  </a:lnTo>
-                  <a:lnTo>
-                    <a:pt x="5514934" y="2865590"/>
-                  </a:lnTo>
-                  <a:lnTo>
-                    <a:pt x="5443311" y="2851441"/>
-                  </a:lnTo>
-                  <a:lnTo>
-                    <a:pt x="5371689" y="2836967"/>
-                  </a:lnTo>
-                  <a:lnTo>
-                    <a:pt x="5300066" y="2822162"/>
-                  </a:lnTo>
-                  <a:lnTo>
-                    <a:pt x="5228444" y="2807019"/>
-                  </a:lnTo>
-                  <a:lnTo>
-                    <a:pt x="5156821" y="2791529"/>
-                  </a:lnTo>
-                  <a:lnTo>
-                    <a:pt x="5085199" y="2775684"/>
-                  </a:lnTo>
-                  <a:lnTo>
-                    <a:pt x="5013576" y="2759476"/>
-                  </a:lnTo>
-                  <a:lnTo>
-                    <a:pt x="4941954" y="2742898"/>
-                  </a:lnTo>
-                  <a:lnTo>
-                    <a:pt x="4870331" y="2725940"/>
-                  </a:lnTo>
-                  <a:lnTo>
-                    <a:pt x="4798709" y="2708594"/>
-                  </a:lnTo>
-                  <a:lnTo>
-                    <a:pt x="4727086" y="2690851"/>
-                  </a:lnTo>
-                  <a:lnTo>
-                    <a:pt x="4655464" y="2672701"/>
-                  </a:lnTo>
-                  <a:lnTo>
-                    <a:pt x="4583841" y="2654326"/>
-                  </a:lnTo>
-                  <a:lnTo>
-                    <a:pt x="4512219" y="2659851"/>
-                  </a:lnTo>
-                  <a:lnTo>
-                    <a:pt x="4440596" y="2665338"/>
-                  </a:lnTo>
-                  <a:lnTo>
-                    <a:pt x="4368974" y="2670790"/>
-                  </a:lnTo>
-                  <a:lnTo>
-                    <a:pt x="4297351" y="2676205"/>
-                  </a:lnTo>
-                  <a:lnTo>
-                    <a:pt x="4225729" y="2681584"/>
-                  </a:lnTo>
-                  <a:lnTo>
-                    <a:pt x="4154106" y="2686927"/>
-                  </a:lnTo>
-                  <a:lnTo>
-                    <a:pt x="4082483" y="2692234"/>
-                  </a:lnTo>
-                  <a:lnTo>
-                    <a:pt x="4010861" y="2697506"/>
-                  </a:lnTo>
-                  <a:lnTo>
-                    <a:pt x="3939238" y="2702743"/>
-                  </a:lnTo>
-                  <a:lnTo>
-                    <a:pt x="3867616" y="2707945"/>
-                  </a:lnTo>
-                  <a:lnTo>
-                    <a:pt x="3795993" y="2713113"/>
-                  </a:lnTo>
-                  <a:lnTo>
-                    <a:pt x="3724371" y="2718246"/>
-                  </a:lnTo>
-                  <a:lnTo>
-                    <a:pt x="3652748" y="2723345"/>
-                  </a:lnTo>
-                  <a:lnTo>
-                    <a:pt x="3581126" y="2728410"/>
-                  </a:lnTo>
-                  <a:lnTo>
-                    <a:pt x="3509503" y="2733441"/>
-                  </a:lnTo>
-                  <a:lnTo>
-                    <a:pt x="3437881" y="2738438"/>
-                  </a:lnTo>
-                  <a:lnTo>
-                    <a:pt x="3366258" y="2743403"/>
-                  </a:lnTo>
-                  <a:lnTo>
-                    <a:pt x="3294636" y="2748334"/>
-                  </a:lnTo>
-                  <a:lnTo>
-                    <a:pt x="3223013" y="2753232"/>
-                  </a:lnTo>
-                  <a:lnTo>
-                    <a:pt x="3151391" y="2758098"/>
-                  </a:lnTo>
-                  <a:lnTo>
-                    <a:pt x="3079768" y="2762932"/>
-                  </a:lnTo>
-                  <a:lnTo>
-                    <a:pt x="3008146" y="2767733"/>
-                  </a:lnTo>
-                  <a:lnTo>
-                    <a:pt x="2936523" y="2772502"/>
-                  </a:lnTo>
-                  <a:lnTo>
-                    <a:pt x="2864901" y="2777240"/>
-                  </a:lnTo>
-                  <a:lnTo>
-                    <a:pt x="2793278" y="2781945"/>
-                  </a:lnTo>
-                  <a:lnTo>
-                    <a:pt x="2721655" y="2786620"/>
-                  </a:lnTo>
-                  <a:lnTo>
-                    <a:pt x="2650033" y="2791263"/>
-                  </a:lnTo>
-                  <a:lnTo>
-                    <a:pt x="2578410" y="2795876"/>
-                  </a:lnTo>
-                  <a:lnTo>
-                    <a:pt x="2506788" y="2800458"/>
-                  </a:lnTo>
-                  <a:lnTo>
-                    <a:pt x="2435165" y="2805009"/>
-                  </a:lnTo>
-                  <a:lnTo>
-                    <a:pt x="2363543" y="2809530"/>
-                  </a:lnTo>
-                  <a:lnTo>
-                    <a:pt x="2291920" y="2814021"/>
-                  </a:lnTo>
-                  <a:lnTo>
-                    <a:pt x="2220298" y="2818482"/>
-                  </a:lnTo>
-                  <a:lnTo>
-                    <a:pt x="2148675" y="2822913"/>
-                  </a:lnTo>
-                  <a:lnTo>
-                    <a:pt x="2077053" y="2827315"/>
-                  </a:lnTo>
-                  <a:lnTo>
-                    <a:pt x="2005430" y="2831687"/>
-                  </a:lnTo>
-                  <a:lnTo>
-                    <a:pt x="1933808" y="2836030"/>
-                  </a:lnTo>
-                  <a:lnTo>
-                    <a:pt x="1862185" y="2840345"/>
-                  </a:lnTo>
-                  <a:lnTo>
-                    <a:pt x="1790563" y="2844630"/>
-                  </a:lnTo>
-                  <a:lnTo>
-                    <a:pt x="1718940" y="2848887"/>
-                  </a:lnTo>
-                  <a:lnTo>
-                    <a:pt x="1647318" y="2853116"/>
-                  </a:lnTo>
-                  <a:lnTo>
-                    <a:pt x="1575695" y="2857316"/>
-                  </a:lnTo>
-                  <a:lnTo>
-                    <a:pt x="1504073" y="2861489"/>
-                  </a:lnTo>
-                  <a:lnTo>
-                    <a:pt x="1432450" y="2865634"/>
-                  </a:lnTo>
-                  <a:lnTo>
-                    <a:pt x="1360827" y="2869751"/>
-                  </a:lnTo>
-                  <a:lnTo>
-                    <a:pt x="1289205" y="2873840"/>
-                  </a:lnTo>
-                  <a:lnTo>
-                    <a:pt x="1217582" y="2877903"/>
-                  </a:lnTo>
-                  <a:lnTo>
-                    <a:pt x="1145960" y="2881938"/>
-                  </a:lnTo>
-                  <a:lnTo>
-                    <a:pt x="1074337" y="2885947"/>
-                  </a:lnTo>
-                  <a:lnTo>
-                    <a:pt x="1002715" y="2889929"/>
-                  </a:lnTo>
-                  <a:lnTo>
-                    <a:pt x="931092" y="2893884"/>
-                  </a:lnTo>
-                  <a:lnTo>
-                    <a:pt x="859470" y="2897813"/>
-                  </a:lnTo>
-                  <a:lnTo>
-                    <a:pt x="787847" y="2901716"/>
-                  </a:lnTo>
-                  <a:lnTo>
-                    <a:pt x="716225" y="2905593"/>
-                  </a:lnTo>
-                  <a:lnTo>
-                    <a:pt x="644602" y="2909443"/>
-                  </a:lnTo>
-                  <a:lnTo>
-                    <a:pt x="572980" y="2913269"/>
-                  </a:lnTo>
-                  <a:lnTo>
-                    <a:pt x="501357" y="2917069"/>
-                  </a:lnTo>
-                  <a:lnTo>
-                    <a:pt x="429735" y="2920843"/>
-                  </a:lnTo>
-                  <a:lnTo>
-                    <a:pt x="358112" y="2924593"/>
-                  </a:lnTo>
-                  <a:lnTo>
-                    <a:pt x="286490" y="2928317"/>
-                  </a:lnTo>
-                  <a:lnTo>
-                    <a:pt x="214867" y="2932017"/>
-                  </a:lnTo>
-                  <a:lnTo>
-                    <a:pt x="143245" y="2935692"/>
-                  </a:lnTo>
-                  <a:lnTo>
-                    <a:pt x="71622" y="2939342"/>
-                  </a:lnTo>
-                  <a:lnTo>
-                    <a:pt x="0" y="2942968"/>
+                    <a:pt x="286490" y="17952"/>
+                  </a:lnTo>
+                  <a:lnTo>
+                    <a:pt x="358112" y="99509"/>
+                  </a:lnTo>
+                  <a:lnTo>
+                    <a:pt x="429735" y="179147"/>
+                  </a:lnTo>
+                  <a:lnTo>
+                    <a:pt x="501357" y="256910"/>
+                  </a:lnTo>
+                  <a:lnTo>
+                    <a:pt x="572980" y="332844"/>
+                  </a:lnTo>
+                  <a:lnTo>
+                    <a:pt x="644602" y="406991"/>
+                  </a:lnTo>
+                  <a:lnTo>
+                    <a:pt x="716225" y="479393"/>
+                  </a:lnTo>
+                  <a:lnTo>
+                    <a:pt x="787847" y="550091"/>
+                  </a:lnTo>
+                  <a:lnTo>
+                    <a:pt x="859470" y="619126"/>
+                  </a:lnTo>
+                  <a:lnTo>
+                    <a:pt x="931092" y="686536"/>
+                  </a:lnTo>
+                  <a:lnTo>
+                    <a:pt x="1002715" y="752360"/>
+                  </a:lnTo>
+                  <a:lnTo>
+                    <a:pt x="1074337" y="816634"/>
+                  </a:lnTo>
+                  <a:lnTo>
+                    <a:pt x="1145960" y="879397"/>
+                  </a:lnTo>
+                  <a:lnTo>
+                    <a:pt x="1217582" y="940682"/>
+                  </a:lnTo>
+                  <a:lnTo>
+                    <a:pt x="1289205" y="1000525"/>
+                  </a:lnTo>
+                  <a:lnTo>
+                    <a:pt x="1360827" y="1058960"/>
+                  </a:lnTo>
+                  <a:lnTo>
+                    <a:pt x="1432450" y="1116020"/>
+                  </a:lnTo>
+                  <a:lnTo>
+                    <a:pt x="1504073" y="1171737"/>
+                  </a:lnTo>
+                  <a:lnTo>
+                    <a:pt x="1575695" y="1226143"/>
+                  </a:lnTo>
+                  <a:lnTo>
+                    <a:pt x="1647318" y="1279269"/>
+                  </a:lnTo>
+                  <a:lnTo>
+                    <a:pt x="1718940" y="1331145"/>
+                  </a:lnTo>
+                  <a:lnTo>
+                    <a:pt x="1790563" y="1381800"/>
+                  </a:lnTo>
+                  <a:lnTo>
+                    <a:pt x="1862185" y="1431263"/>
+                  </a:lnTo>
+                  <a:lnTo>
+                    <a:pt x="1933808" y="1479562"/>
+                  </a:lnTo>
+                  <a:lnTo>
+                    <a:pt x="2005430" y="1526724"/>
+                  </a:lnTo>
+                  <a:lnTo>
+                    <a:pt x="2077053" y="1572776"/>
+                  </a:lnTo>
+                  <a:lnTo>
+                    <a:pt x="2148675" y="1617745"/>
+                  </a:lnTo>
+                  <a:lnTo>
+                    <a:pt x="2220298" y="1661656"/>
+                  </a:lnTo>
+                  <a:lnTo>
+                    <a:pt x="2291920" y="1704533"/>
+                  </a:lnTo>
+                  <a:lnTo>
+                    <a:pt x="2363543" y="1746402"/>
+                  </a:lnTo>
+                  <a:lnTo>
+                    <a:pt x="2435165" y="1787285"/>
+                  </a:lnTo>
+                  <a:lnTo>
+                    <a:pt x="2506788" y="1827206"/>
+                  </a:lnTo>
+                  <a:lnTo>
+                    <a:pt x="2578410" y="1866187"/>
+                  </a:lnTo>
+                  <a:lnTo>
+                    <a:pt x="2650033" y="1904252"/>
+                  </a:lnTo>
+                  <a:lnTo>
+                    <a:pt x="2721655" y="1941420"/>
+                  </a:lnTo>
+                  <a:lnTo>
+                    <a:pt x="2793278" y="1977714"/>
+                  </a:lnTo>
+                  <a:lnTo>
+                    <a:pt x="2864901" y="2013154"/>
+                  </a:lnTo>
+                  <a:lnTo>
+                    <a:pt x="2936523" y="2047760"/>
+                  </a:lnTo>
+                  <a:lnTo>
+                    <a:pt x="3008146" y="2081551"/>
+                  </a:lnTo>
+                  <a:lnTo>
+                    <a:pt x="3079768" y="2114548"/>
+                  </a:lnTo>
+                  <a:lnTo>
+                    <a:pt x="3151391" y="2146768"/>
+                  </a:lnTo>
+                  <a:lnTo>
+                    <a:pt x="3223013" y="2178229"/>
+                  </a:lnTo>
+                  <a:lnTo>
+                    <a:pt x="3294636" y="2208951"/>
+                  </a:lnTo>
+                  <a:lnTo>
+                    <a:pt x="3366258" y="2238949"/>
+                  </a:lnTo>
+                  <a:lnTo>
+                    <a:pt x="3437881" y="2268242"/>
+                  </a:lnTo>
+                  <a:lnTo>
+                    <a:pt x="3509503" y="2296845"/>
+                  </a:lnTo>
+                  <a:lnTo>
+                    <a:pt x="3581126" y="2324775"/>
+                  </a:lnTo>
+                  <a:lnTo>
+                    <a:pt x="3652748" y="2352048"/>
+                  </a:lnTo>
+                  <a:lnTo>
+                    <a:pt x="3724371" y="2378679"/>
+                  </a:lnTo>
+                  <a:lnTo>
+                    <a:pt x="3795993" y="2404683"/>
+                  </a:lnTo>
+                  <a:lnTo>
+                    <a:pt x="3867616" y="2430076"/>
+                  </a:lnTo>
+                  <a:lnTo>
+                    <a:pt x="3939238" y="2454871"/>
+                  </a:lnTo>
+                  <a:lnTo>
+                    <a:pt x="4010861" y="2479082"/>
+                  </a:lnTo>
+                  <a:lnTo>
+                    <a:pt x="4082483" y="2502724"/>
+                  </a:lnTo>
+                  <a:lnTo>
+                    <a:pt x="4154106" y="2525809"/>
+                  </a:lnTo>
+                  <a:lnTo>
+                    <a:pt x="4225729" y="2548351"/>
+                  </a:lnTo>
+                  <a:lnTo>
+                    <a:pt x="4297351" y="2570363"/>
+                  </a:lnTo>
+                  <a:lnTo>
+                    <a:pt x="4368974" y="2591856"/>
+                  </a:lnTo>
+                  <a:lnTo>
+                    <a:pt x="4440596" y="2612844"/>
+                  </a:lnTo>
+                  <a:lnTo>
+                    <a:pt x="4512219" y="2633338"/>
+                  </a:lnTo>
+                  <a:lnTo>
+                    <a:pt x="4583841" y="2653350"/>
+                  </a:lnTo>
+                  <a:lnTo>
+                    <a:pt x="4655464" y="2649627"/>
+                  </a:lnTo>
+                  <a:lnTo>
+                    <a:pt x="4727086" y="2644713"/>
+                  </a:lnTo>
+                  <a:lnTo>
+                    <a:pt x="4798709" y="2639770"/>
+                  </a:lnTo>
+                  <a:lnTo>
+                    <a:pt x="4870331" y="2634798"/>
+                  </a:lnTo>
+                  <a:lnTo>
+                    <a:pt x="4941954" y="2629796"/>
+                  </a:lnTo>
+                  <a:lnTo>
+                    <a:pt x="5013576" y="2624765"/>
+                  </a:lnTo>
+                  <a:lnTo>
+                    <a:pt x="5085199" y="2619705"/>
+                  </a:lnTo>
+                  <a:lnTo>
+                    <a:pt x="5156821" y="2614614"/>
+                  </a:lnTo>
+                  <a:lnTo>
+                    <a:pt x="5228444" y="2609494"/>
+                  </a:lnTo>
+                  <a:lnTo>
+                    <a:pt x="5300066" y="2604343"/>
+                  </a:lnTo>
+                  <a:lnTo>
+                    <a:pt x="5371689" y="2599162"/>
+                  </a:lnTo>
+                  <a:lnTo>
+                    <a:pt x="5443311" y="2593951"/>
+                  </a:lnTo>
+                  <a:lnTo>
+                    <a:pt x="5514934" y="2588709"/>
+                  </a:lnTo>
+                  <a:lnTo>
+                    <a:pt x="5586557" y="2583435"/>
+                  </a:lnTo>
+                  <a:lnTo>
+                    <a:pt x="5658179" y="2578131"/>
+                  </a:lnTo>
+                  <a:lnTo>
+                    <a:pt x="5729802" y="2572796"/>
+                  </a:lnTo>
+                  <a:lnTo>
+                    <a:pt x="5801424" y="2567429"/>
+                  </a:lnTo>
+                  <a:lnTo>
+                    <a:pt x="5873047" y="2562031"/>
+                  </a:lnTo>
+                  <a:lnTo>
+                    <a:pt x="5944669" y="2556600"/>
+                  </a:lnTo>
+                  <a:lnTo>
+                    <a:pt x="6016292" y="2551138"/>
+                  </a:lnTo>
+                  <a:lnTo>
+                    <a:pt x="6087914" y="2545644"/>
+                  </a:lnTo>
+                  <a:lnTo>
+                    <a:pt x="6159537" y="2540117"/>
+                  </a:lnTo>
+                  <a:lnTo>
+                    <a:pt x="6231159" y="2534558"/>
+                  </a:lnTo>
+                  <a:lnTo>
+                    <a:pt x="6302782" y="2528966"/>
+                  </a:lnTo>
+                  <a:lnTo>
+                    <a:pt x="6374404" y="2523341"/>
+                  </a:lnTo>
+                  <a:lnTo>
+                    <a:pt x="6446027" y="2517682"/>
+                  </a:lnTo>
+                  <a:lnTo>
+                    <a:pt x="6517649" y="2511991"/>
+                  </a:lnTo>
+                  <a:lnTo>
+                    <a:pt x="6589272" y="2506266"/>
+                  </a:lnTo>
+                  <a:lnTo>
+                    <a:pt x="6660894" y="2500507"/>
+                  </a:lnTo>
+                  <a:lnTo>
+                    <a:pt x="6732517" y="2494714"/>
+                  </a:lnTo>
+                  <a:lnTo>
+                    <a:pt x="6804139" y="2488888"/>
+                  </a:lnTo>
+                  <a:lnTo>
+                    <a:pt x="6875762" y="2483026"/>
+                  </a:lnTo>
+                  <a:lnTo>
+                    <a:pt x="6947385" y="2477131"/>
+                  </a:lnTo>
+                  <a:lnTo>
+                    <a:pt x="7019007" y="2471200"/>
+                  </a:lnTo>
+                  <a:lnTo>
+                    <a:pt x="7090630" y="2465235"/>
+                  </a:lnTo>
+                  <a:lnTo>
+                    <a:pt x="7090630" y="3122905"/>
+                  </a:lnTo>
+                  <a:lnTo>
+                    <a:pt x="7019007" y="3114209"/>
+                  </a:lnTo>
+                  <a:lnTo>
+                    <a:pt x="6947385" y="3105303"/>
+                  </a:lnTo>
+                  <a:lnTo>
+                    <a:pt x="6875762" y="3096183"/>
+                  </a:lnTo>
+                  <a:lnTo>
+                    <a:pt x="6804139" y="3086843"/>
+                  </a:lnTo>
+                  <a:lnTo>
+                    <a:pt x="6732517" y="3077278"/>
+                  </a:lnTo>
+                  <a:lnTo>
+                    <a:pt x="6660894" y="3067483"/>
+                  </a:lnTo>
+                  <a:lnTo>
+                    <a:pt x="6589272" y="3057451"/>
+                  </a:lnTo>
+                  <a:lnTo>
+                    <a:pt x="6517649" y="3047178"/>
+                  </a:lnTo>
+                  <a:lnTo>
+                    <a:pt x="6446027" y="3036657"/>
+                  </a:lnTo>
+                  <a:lnTo>
+                    <a:pt x="6374404" y="3025882"/>
+                  </a:lnTo>
+                  <a:lnTo>
+                    <a:pt x="6302782" y="3014848"/>
+                  </a:lnTo>
+                  <a:lnTo>
+                    <a:pt x="6231159" y="3003548"/>
+                  </a:lnTo>
+                  <a:lnTo>
+                    <a:pt x="6159537" y="2991976"/>
+                  </a:lnTo>
+                  <a:lnTo>
+                    <a:pt x="6087914" y="2980125"/>
+                  </a:lnTo>
+                  <a:lnTo>
+                    <a:pt x="6016292" y="2967988"/>
+                  </a:lnTo>
+                  <a:lnTo>
+                    <a:pt x="5944669" y="2955559"/>
+                  </a:lnTo>
+                  <a:lnTo>
+                    <a:pt x="5873047" y="2942830"/>
+                  </a:lnTo>
+                  <a:lnTo>
+                    <a:pt x="5801424" y="2929794"/>
+                  </a:lnTo>
+                  <a:lnTo>
+                    <a:pt x="5729802" y="2916445"/>
+                  </a:lnTo>
+                  <a:lnTo>
+                    <a:pt x="5658179" y="2902773"/>
+                  </a:lnTo>
+                  <a:lnTo>
+                    <a:pt x="5586557" y="2888772"/>
+                  </a:lnTo>
+                  <a:lnTo>
+                    <a:pt x="5514934" y="2874434"/>
+                  </a:lnTo>
+                  <a:lnTo>
+                    <a:pt x="5443311" y="2859750"/>
+                  </a:lnTo>
+                  <a:lnTo>
+                    <a:pt x="5371689" y="2844713"/>
+                  </a:lnTo>
+                  <a:lnTo>
+                    <a:pt x="5300066" y="2829312"/>
+                  </a:lnTo>
+                  <a:lnTo>
+                    <a:pt x="5228444" y="2813541"/>
+                  </a:lnTo>
+                  <a:lnTo>
+                    <a:pt x="5156821" y="2797390"/>
+                  </a:lnTo>
+                  <a:lnTo>
+                    <a:pt x="5085199" y="2780849"/>
+                  </a:lnTo>
+                  <a:lnTo>
+                    <a:pt x="5013576" y="2763910"/>
+                  </a:lnTo>
+                  <a:lnTo>
+                    <a:pt x="4941954" y="2746563"/>
+                  </a:lnTo>
+                  <a:lnTo>
+                    <a:pt x="4870331" y="2728798"/>
+                  </a:lnTo>
+                  <a:lnTo>
+                    <a:pt x="4798709" y="2710604"/>
+                  </a:lnTo>
+                  <a:lnTo>
+                    <a:pt x="4727086" y="2691972"/>
+                  </a:lnTo>
+                  <a:lnTo>
+                    <a:pt x="4655464" y="2672891"/>
+                  </a:lnTo>
+                  <a:lnTo>
+                    <a:pt x="4583841" y="2654513"/>
+                  </a:lnTo>
+                  <a:lnTo>
+                    <a:pt x="4512219" y="2659370"/>
+                  </a:lnTo>
+                  <a:lnTo>
+                    <a:pt x="4440596" y="2664198"/>
+                  </a:lnTo>
+                  <a:lnTo>
+                    <a:pt x="4368974" y="2668998"/>
+                  </a:lnTo>
+                  <a:lnTo>
+                    <a:pt x="4297351" y="2673770"/>
+                  </a:lnTo>
+                  <a:lnTo>
+                    <a:pt x="4225729" y="2678514"/>
+                  </a:lnTo>
+                  <a:lnTo>
+                    <a:pt x="4154106" y="2683230"/>
+                  </a:lnTo>
+                  <a:lnTo>
+                    <a:pt x="4082483" y="2687919"/>
+                  </a:lnTo>
+                  <a:lnTo>
+                    <a:pt x="4010861" y="2692580"/>
+                  </a:lnTo>
+                  <a:lnTo>
+                    <a:pt x="3939238" y="2697214"/>
+                  </a:lnTo>
+                  <a:lnTo>
+                    <a:pt x="3867616" y="2701820"/>
+                  </a:lnTo>
+                  <a:lnTo>
+                    <a:pt x="3795993" y="2706400"/>
+                  </a:lnTo>
+                  <a:lnTo>
+                    <a:pt x="3724371" y="2710953"/>
+                  </a:lnTo>
+                  <a:lnTo>
+                    <a:pt x="3652748" y="2715479"/>
+                  </a:lnTo>
+                  <a:lnTo>
+                    <a:pt x="3581126" y="2719979"/>
+                  </a:lnTo>
+                  <a:lnTo>
+                    <a:pt x="3509503" y="2724452"/>
+                  </a:lnTo>
+                  <a:lnTo>
+                    <a:pt x="3437881" y="2728899"/>
+                  </a:lnTo>
+                  <a:lnTo>
+                    <a:pt x="3366258" y="2733320"/>
+                  </a:lnTo>
+                  <a:lnTo>
+                    <a:pt x="3294636" y="2737715"/>
+                  </a:lnTo>
+                  <a:lnTo>
+                    <a:pt x="3223013" y="2742085"/>
+                  </a:lnTo>
+                  <a:lnTo>
+                    <a:pt x="3151391" y="2746429"/>
+                  </a:lnTo>
+                  <a:lnTo>
+                    <a:pt x="3079768" y="2750747"/>
+                  </a:lnTo>
+                  <a:lnTo>
+                    <a:pt x="3008146" y="2755040"/>
+                  </a:lnTo>
+                  <a:lnTo>
+                    <a:pt x="2936523" y="2759308"/>
+                  </a:lnTo>
+                  <a:lnTo>
+                    <a:pt x="2864901" y="2763551"/>
+                  </a:lnTo>
+                  <a:lnTo>
+                    <a:pt x="2793278" y="2767769"/>
+                  </a:lnTo>
+                  <a:lnTo>
+                    <a:pt x="2721655" y="2771963"/>
+                  </a:lnTo>
+                  <a:lnTo>
+                    <a:pt x="2650033" y="2776132"/>
+                  </a:lnTo>
+                  <a:lnTo>
+                    <a:pt x="2578410" y="2780276"/>
+                  </a:lnTo>
+                  <a:lnTo>
+                    <a:pt x="2506788" y="2784396"/>
+                  </a:lnTo>
+                  <a:lnTo>
+                    <a:pt x="2435165" y="2788492"/>
+                  </a:lnTo>
+                  <a:lnTo>
+                    <a:pt x="2363543" y="2792565"/>
+                  </a:lnTo>
+                  <a:lnTo>
+                    <a:pt x="2291920" y="2796613"/>
+                  </a:lnTo>
+                  <a:lnTo>
+                    <a:pt x="2220298" y="2800637"/>
+                  </a:lnTo>
+                  <a:lnTo>
+                    <a:pt x="2148675" y="2804638"/>
+                  </a:lnTo>
+                  <a:lnTo>
+                    <a:pt x="2077053" y="2808616"/>
+                  </a:lnTo>
+                  <a:lnTo>
+                    <a:pt x="2005430" y="2812570"/>
+                  </a:lnTo>
+                  <a:lnTo>
+                    <a:pt x="1933808" y="2816501"/>
+                  </a:lnTo>
+                  <a:lnTo>
+                    <a:pt x="1862185" y="2820409"/>
+                  </a:lnTo>
+                  <a:lnTo>
+                    <a:pt x="1790563" y="2824294"/>
+                  </a:lnTo>
+                  <a:lnTo>
+                    <a:pt x="1718940" y="2828156"/>
+                  </a:lnTo>
+                  <a:lnTo>
+                    <a:pt x="1647318" y="2831996"/>
+                  </a:lnTo>
+                  <a:lnTo>
+                    <a:pt x="1575695" y="2835813"/>
+                  </a:lnTo>
+                  <a:lnTo>
+                    <a:pt x="1504073" y="2839608"/>
+                  </a:lnTo>
+                  <a:lnTo>
+                    <a:pt x="1432450" y="2843381"/>
+                  </a:lnTo>
+                  <a:lnTo>
+                    <a:pt x="1360827" y="2847132"/>
+                  </a:lnTo>
+                  <a:lnTo>
+                    <a:pt x="1289205" y="2850860"/>
+                  </a:lnTo>
+                  <a:lnTo>
+                    <a:pt x="1217582" y="2854567"/>
+                  </a:lnTo>
+                  <a:lnTo>
+                    <a:pt x="1145960" y="2858252"/>
+                  </a:lnTo>
+                  <a:lnTo>
+                    <a:pt x="1074337" y="2861916"/>
+                  </a:lnTo>
+                  <a:lnTo>
+                    <a:pt x="1002715" y="2865558"/>
+                  </a:lnTo>
+                  <a:lnTo>
+                    <a:pt x="931092" y="2869178"/>
+                  </a:lnTo>
+                  <a:lnTo>
+                    <a:pt x="859470" y="2872778"/>
+                  </a:lnTo>
+                  <a:lnTo>
+                    <a:pt x="787847" y="2876356"/>
+                  </a:lnTo>
+                  <a:lnTo>
+                    <a:pt x="716225" y="2879914"/>
+                  </a:lnTo>
+                  <a:lnTo>
+                    <a:pt x="644602" y="2883450"/>
+                  </a:lnTo>
+                  <a:lnTo>
+                    <a:pt x="572980" y="2886966"/>
+                  </a:lnTo>
+                  <a:lnTo>
+                    <a:pt x="501357" y="2890461"/>
+                  </a:lnTo>
+                  <a:lnTo>
+                    <a:pt x="429735" y="2893936"/>
+                  </a:lnTo>
+                  <a:lnTo>
+                    <a:pt x="358112" y="2897391"/>
+                  </a:lnTo>
+                  <a:lnTo>
+                    <a:pt x="286490" y="2900825"/>
+                  </a:lnTo>
+                  <a:lnTo>
+                    <a:pt x="214867" y="2904239"/>
+                  </a:lnTo>
+                  <a:lnTo>
+                    <a:pt x="143245" y="2907633"/>
+                  </a:lnTo>
+                  <a:lnTo>
+                    <a:pt x="71622" y="2911008"/>
+                  </a:lnTo>
+                  <a:lnTo>
+                    <a:pt x="0" y="2914362"/>
                   </a:lnTo>
                   <a:close/>
                 </a:path>
@@ -3547,312 +3538,303 @@
           </p:nvSpPr>
           <p:spPr>
             <a:xfrm>
-              <a:off x="1215061" y="2073503"/>
-              <a:ext cx="7047617" cy="2654137"/>
+              <a:off x="1443144" y="2073503"/>
+              <a:ext cx="6819534" cy="2653350"/>
             </a:xfrm>
             <a:custGeom>
               <a:avLst/>
               <a:pathLst>
-                <a:path w="7047617" h="2654137">
+                <a:path w="6819534" h="2653350">
                   <a:moveTo>
                     <a:pt x="0" y="0"/>
                   </a:moveTo>
                   <a:lnTo>
-                    <a:pt x="28610" y="31565"/>
-                  </a:lnTo>
-                  <a:lnTo>
-                    <a:pt x="100232" y="108817"/>
-                  </a:lnTo>
-                  <a:lnTo>
-                    <a:pt x="171855" y="184340"/>
-                  </a:lnTo>
-                  <a:lnTo>
-                    <a:pt x="243477" y="258173"/>
-                  </a:lnTo>
-                  <a:lnTo>
-                    <a:pt x="315100" y="330354"/>
-                  </a:lnTo>
-                  <a:lnTo>
-                    <a:pt x="386723" y="400919"/>
-                  </a:lnTo>
-                  <a:lnTo>
-                    <a:pt x="458345" y="469906"/>
-                  </a:lnTo>
-                  <a:lnTo>
-                    <a:pt x="529968" y="537348"/>
-                  </a:lnTo>
-                  <a:lnTo>
-                    <a:pt x="601590" y="603282"/>
-                  </a:lnTo>
-                  <a:lnTo>
-                    <a:pt x="673213" y="667740"/>
-                  </a:lnTo>
-                  <a:lnTo>
-                    <a:pt x="744835" y="730756"/>
-                  </a:lnTo>
-                  <a:lnTo>
-                    <a:pt x="816458" y="792361"/>
-                  </a:lnTo>
-                  <a:lnTo>
-                    <a:pt x="888080" y="852588"/>
-                  </a:lnTo>
-                  <a:lnTo>
-                    <a:pt x="959703" y="911467"/>
-                  </a:lnTo>
-                  <a:lnTo>
-                    <a:pt x="1031325" y="969029"/>
-                  </a:lnTo>
-                  <a:lnTo>
-                    <a:pt x="1102948" y="1025302"/>
-                  </a:lnTo>
-                  <a:lnTo>
-                    <a:pt x="1174570" y="1080317"/>
-                  </a:lnTo>
-                  <a:lnTo>
-                    <a:pt x="1246193" y="1134100"/>
-                  </a:lnTo>
-                  <a:lnTo>
-                    <a:pt x="1317815" y="1186679"/>
-                  </a:lnTo>
-                  <a:lnTo>
-                    <a:pt x="1389438" y="1238082"/>
-                  </a:lnTo>
-                  <a:lnTo>
-                    <a:pt x="1461060" y="1288335"/>
-                  </a:lnTo>
-                  <a:lnTo>
-                    <a:pt x="1532683" y="1337463"/>
-                  </a:lnTo>
-                  <a:lnTo>
-                    <a:pt x="1604305" y="1385492"/>
-                  </a:lnTo>
-                  <a:lnTo>
-                    <a:pt x="1675928" y="1432446"/>
-                  </a:lnTo>
-                  <a:lnTo>
-                    <a:pt x="1747551" y="1478349"/>
-                  </a:lnTo>
-                  <a:lnTo>
-                    <a:pt x="1819173" y="1523225"/>
-                  </a:lnTo>
-                  <a:lnTo>
-                    <a:pt x="1890796" y="1567097"/>
-                  </a:lnTo>
-                  <a:lnTo>
-                    <a:pt x="1962418" y="1609988"/>
-                  </a:lnTo>
-                  <a:lnTo>
-                    <a:pt x="2034041" y="1651918"/>
-                  </a:lnTo>
-                  <a:lnTo>
-                    <a:pt x="2105663" y="1692910"/>
-                  </a:lnTo>
-                  <a:lnTo>
-                    <a:pt x="2177286" y="1732985"/>
-                  </a:lnTo>
-                  <a:lnTo>
-                    <a:pt x="2248908" y="1772163"/>
-                  </a:lnTo>
-                  <a:lnTo>
-                    <a:pt x="2320531" y="1810464"/>
-                  </a:lnTo>
-                  <a:lnTo>
-                    <a:pt x="2392153" y="1847908"/>
-                  </a:lnTo>
-                  <a:lnTo>
-                    <a:pt x="2463776" y="1884514"/>
-                  </a:lnTo>
-                  <a:lnTo>
-                    <a:pt x="2535398" y="1920301"/>
-                  </a:lnTo>
-                  <a:lnTo>
-                    <a:pt x="2607021" y="1955288"/>
-                  </a:lnTo>
-                  <a:lnTo>
-                    <a:pt x="2678643" y="1989491"/>
-                  </a:lnTo>
-                  <a:lnTo>
-                    <a:pt x="2750266" y="2022929"/>
-                  </a:lnTo>
-                  <a:lnTo>
-                    <a:pt x="2821888" y="2055619"/>
-                  </a:lnTo>
-                  <a:lnTo>
-                    <a:pt x="2893511" y="2087577"/>
-                  </a:lnTo>
-                  <a:lnTo>
-                    <a:pt x="2965133" y="2118820"/>
-                  </a:lnTo>
-                  <a:lnTo>
-                    <a:pt x="3036756" y="2149364"/>
-                  </a:lnTo>
-                  <a:lnTo>
-                    <a:pt x="3108379" y="2179224"/>
-                  </a:lnTo>
-                  <a:lnTo>
-                    <a:pt x="3180001" y="2208416"/>
-                  </a:lnTo>
-                  <a:lnTo>
-                    <a:pt x="3251624" y="2236955"/>
-                  </a:lnTo>
-                  <a:lnTo>
-                    <a:pt x="3323246" y="2264855"/>
-                  </a:lnTo>
-                  <a:lnTo>
-                    <a:pt x="3394869" y="2292131"/>
-                  </a:lnTo>
-                  <a:lnTo>
-                    <a:pt x="3466491" y="2318797"/>
-                  </a:lnTo>
-                  <a:lnTo>
-                    <a:pt x="3538114" y="2344866"/>
-                  </a:lnTo>
-                  <a:lnTo>
-                    <a:pt x="3609736" y="2370351"/>
-                  </a:lnTo>
-                  <a:lnTo>
-                    <a:pt x="3681359" y="2395266"/>
-                  </a:lnTo>
-                  <a:lnTo>
-                    <a:pt x="3752981" y="2419624"/>
-                  </a:lnTo>
-                  <a:lnTo>
-                    <a:pt x="3824604" y="2443437"/>
-                  </a:lnTo>
-                  <a:lnTo>
-                    <a:pt x="3896226" y="2466716"/>
-                  </a:lnTo>
-                  <a:lnTo>
-                    <a:pt x="3967849" y="2489475"/>
-                  </a:lnTo>
-                  <a:lnTo>
-                    <a:pt x="4039471" y="2511725"/>
-                  </a:lnTo>
-                  <a:lnTo>
-                    <a:pt x="4111094" y="2533476"/>
-                  </a:lnTo>
-                  <a:lnTo>
-                    <a:pt x="4182716" y="2554741"/>
-                  </a:lnTo>
-                  <a:lnTo>
-                    <a:pt x="4254339" y="2575530"/>
-                  </a:lnTo>
-                  <a:lnTo>
-                    <a:pt x="4325961" y="2595854"/>
-                  </a:lnTo>
-                  <a:lnTo>
-                    <a:pt x="4397584" y="2615723"/>
-                  </a:lnTo>
-                  <a:lnTo>
-                    <a:pt x="4469207" y="2635147"/>
-                  </a:lnTo>
-                  <a:lnTo>
-                    <a:pt x="4540829" y="2654137"/>
-                  </a:lnTo>
-                  <a:lnTo>
-                    <a:pt x="4612452" y="2648764"/>
-                  </a:lnTo>
-                  <a:lnTo>
-                    <a:pt x="4684074" y="2643165"/>
-                  </a:lnTo>
-                  <a:lnTo>
-                    <a:pt x="4755697" y="2637529"/>
-                  </a:lnTo>
-                  <a:lnTo>
-                    <a:pt x="4827319" y="2631855"/>
-                  </a:lnTo>
-                  <a:lnTo>
-                    <a:pt x="4898942" y="2626142"/>
-                  </a:lnTo>
-                  <a:lnTo>
-                    <a:pt x="4970564" y="2620392"/>
-                  </a:lnTo>
-                  <a:lnTo>
-                    <a:pt x="5042187" y="2614602"/>
-                  </a:lnTo>
-                  <a:lnTo>
-                    <a:pt x="5113809" y="2608774"/>
-                  </a:lnTo>
-                  <a:lnTo>
-                    <a:pt x="5185432" y="2602907"/>
-                  </a:lnTo>
-                  <a:lnTo>
-                    <a:pt x="5257054" y="2597001"/>
-                  </a:lnTo>
-                  <a:lnTo>
-                    <a:pt x="5328677" y="2591055"/>
-                  </a:lnTo>
-                  <a:lnTo>
-                    <a:pt x="5400299" y="2585069"/>
-                  </a:lnTo>
-                  <a:lnTo>
-                    <a:pt x="5471922" y="2579043"/>
-                  </a:lnTo>
-                  <a:lnTo>
-                    <a:pt x="5543544" y="2572976"/>
-                  </a:lnTo>
-                  <a:lnTo>
-                    <a:pt x="5615167" y="2566869"/>
-                  </a:lnTo>
-                  <a:lnTo>
-                    <a:pt x="5686789" y="2560721"/>
-                  </a:lnTo>
-                  <a:lnTo>
-                    <a:pt x="5758412" y="2554532"/>
-                  </a:lnTo>
-                  <a:lnTo>
-                    <a:pt x="5830035" y="2548301"/>
-                  </a:lnTo>
-                  <a:lnTo>
-                    <a:pt x="5901657" y="2542028"/>
-                  </a:lnTo>
-                  <a:lnTo>
-                    <a:pt x="5973280" y="2535714"/>
-                  </a:lnTo>
-                  <a:lnTo>
-                    <a:pt x="6044902" y="2529357"/>
-                  </a:lnTo>
-                  <a:lnTo>
-                    <a:pt x="6116525" y="2522957"/>
-                  </a:lnTo>
-                  <a:lnTo>
-                    <a:pt x="6188147" y="2516514"/>
-                  </a:lnTo>
-                  <a:lnTo>
-                    <a:pt x="6259770" y="2510029"/>
-                  </a:lnTo>
-                  <a:lnTo>
-                    <a:pt x="6331392" y="2503500"/>
-                  </a:lnTo>
-                  <a:lnTo>
-                    <a:pt x="6403015" y="2496926"/>
-                  </a:lnTo>
-                  <a:lnTo>
-                    <a:pt x="6474637" y="2490309"/>
-                  </a:lnTo>
-                  <a:lnTo>
-                    <a:pt x="6546260" y="2483648"/>
-                  </a:lnTo>
-                  <a:lnTo>
-                    <a:pt x="6617882" y="2476942"/>
-                  </a:lnTo>
-                  <a:lnTo>
-                    <a:pt x="6689505" y="2470191"/>
-                  </a:lnTo>
-                  <a:lnTo>
-                    <a:pt x="6761127" y="2463394"/>
-                  </a:lnTo>
-                  <a:lnTo>
-                    <a:pt x="6832750" y="2456552"/>
-                  </a:lnTo>
-                  <a:lnTo>
-                    <a:pt x="6904372" y="2449665"/>
-                  </a:lnTo>
-                  <a:lnTo>
-                    <a:pt x="6975995" y="2442731"/>
-                  </a:lnTo>
-                  <a:lnTo>
-                    <a:pt x="7047617" y="2435750"/>
+                    <a:pt x="15394" y="17952"/>
+                  </a:lnTo>
+                  <a:lnTo>
+                    <a:pt x="87017" y="99509"/>
+                  </a:lnTo>
+                  <a:lnTo>
+                    <a:pt x="158639" y="179147"/>
+                  </a:lnTo>
+                  <a:lnTo>
+                    <a:pt x="230262" y="256910"/>
+                  </a:lnTo>
+                  <a:lnTo>
+                    <a:pt x="301884" y="332844"/>
+                  </a:lnTo>
+                  <a:lnTo>
+                    <a:pt x="373507" y="406991"/>
+                  </a:lnTo>
+                  <a:lnTo>
+                    <a:pt x="445129" y="479393"/>
+                  </a:lnTo>
+                  <a:lnTo>
+                    <a:pt x="516752" y="550091"/>
+                  </a:lnTo>
+                  <a:lnTo>
+                    <a:pt x="588374" y="619126"/>
+                  </a:lnTo>
+                  <a:lnTo>
+                    <a:pt x="659997" y="686536"/>
+                  </a:lnTo>
+                  <a:lnTo>
+                    <a:pt x="731620" y="752360"/>
+                  </a:lnTo>
+                  <a:lnTo>
+                    <a:pt x="803242" y="816634"/>
+                  </a:lnTo>
+                  <a:lnTo>
+                    <a:pt x="874865" y="879397"/>
+                  </a:lnTo>
+                  <a:lnTo>
+                    <a:pt x="946487" y="940682"/>
+                  </a:lnTo>
+                  <a:lnTo>
+                    <a:pt x="1018110" y="1000525"/>
+                  </a:lnTo>
+                  <a:lnTo>
+                    <a:pt x="1089732" y="1058960"/>
+                  </a:lnTo>
+                  <a:lnTo>
+                    <a:pt x="1161355" y="1116020"/>
+                  </a:lnTo>
+                  <a:lnTo>
+                    <a:pt x="1232977" y="1171737"/>
+                  </a:lnTo>
+                  <a:lnTo>
+                    <a:pt x="1304600" y="1226143"/>
+                  </a:lnTo>
+                  <a:lnTo>
+                    <a:pt x="1376222" y="1279269"/>
+                  </a:lnTo>
+                  <a:lnTo>
+                    <a:pt x="1447845" y="1331145"/>
+                  </a:lnTo>
+                  <a:lnTo>
+                    <a:pt x="1519467" y="1381800"/>
+                  </a:lnTo>
+                  <a:lnTo>
+                    <a:pt x="1591090" y="1431263"/>
+                  </a:lnTo>
+                  <a:lnTo>
+                    <a:pt x="1662712" y="1479562"/>
+                  </a:lnTo>
+                  <a:lnTo>
+                    <a:pt x="1734335" y="1526724"/>
+                  </a:lnTo>
+                  <a:lnTo>
+                    <a:pt x="1805957" y="1572776"/>
+                  </a:lnTo>
+                  <a:lnTo>
+                    <a:pt x="1877580" y="1617745"/>
+                  </a:lnTo>
+                  <a:lnTo>
+                    <a:pt x="1949202" y="1661656"/>
+                  </a:lnTo>
+                  <a:lnTo>
+                    <a:pt x="2020825" y="1704533"/>
+                  </a:lnTo>
+                  <a:lnTo>
+                    <a:pt x="2092448" y="1746402"/>
+                  </a:lnTo>
+                  <a:lnTo>
+                    <a:pt x="2164070" y="1787285"/>
+                  </a:lnTo>
+                  <a:lnTo>
+                    <a:pt x="2235693" y="1827206"/>
+                  </a:lnTo>
+                  <a:lnTo>
+                    <a:pt x="2307315" y="1866187"/>
+                  </a:lnTo>
+                  <a:lnTo>
+                    <a:pt x="2378938" y="1904252"/>
+                  </a:lnTo>
+                  <a:lnTo>
+                    <a:pt x="2450560" y="1941420"/>
+                  </a:lnTo>
+                  <a:lnTo>
+                    <a:pt x="2522183" y="1977714"/>
+                  </a:lnTo>
+                  <a:lnTo>
+                    <a:pt x="2593805" y="2013154"/>
+                  </a:lnTo>
+                  <a:lnTo>
+                    <a:pt x="2665428" y="2047760"/>
+                  </a:lnTo>
+                  <a:lnTo>
+                    <a:pt x="2737050" y="2081551"/>
+                  </a:lnTo>
+                  <a:lnTo>
+                    <a:pt x="2808673" y="2114548"/>
+                  </a:lnTo>
+                  <a:lnTo>
+                    <a:pt x="2880295" y="2146768"/>
+                  </a:lnTo>
+                  <a:lnTo>
+                    <a:pt x="2951918" y="2178229"/>
+                  </a:lnTo>
+                  <a:lnTo>
+                    <a:pt x="3023540" y="2208951"/>
+                  </a:lnTo>
+                  <a:lnTo>
+                    <a:pt x="3095163" y="2238949"/>
+                  </a:lnTo>
+                  <a:lnTo>
+                    <a:pt x="3166785" y="2268242"/>
+                  </a:lnTo>
+                  <a:lnTo>
+                    <a:pt x="3238408" y="2296845"/>
+                  </a:lnTo>
+                  <a:lnTo>
+                    <a:pt x="3310030" y="2324775"/>
+                  </a:lnTo>
+                  <a:lnTo>
+                    <a:pt x="3381653" y="2352048"/>
+                  </a:lnTo>
+                  <a:lnTo>
+                    <a:pt x="3453276" y="2378679"/>
+                  </a:lnTo>
+                  <a:lnTo>
+                    <a:pt x="3524898" y="2404683"/>
+                  </a:lnTo>
+                  <a:lnTo>
+                    <a:pt x="3596521" y="2430076"/>
+                  </a:lnTo>
+                  <a:lnTo>
+                    <a:pt x="3668143" y="2454871"/>
+                  </a:lnTo>
+                  <a:lnTo>
+                    <a:pt x="3739766" y="2479082"/>
+                  </a:lnTo>
+                  <a:lnTo>
+                    <a:pt x="3811388" y="2502724"/>
+                  </a:lnTo>
+                  <a:lnTo>
+                    <a:pt x="3883011" y="2525809"/>
+                  </a:lnTo>
+                  <a:lnTo>
+                    <a:pt x="3954633" y="2548351"/>
+                  </a:lnTo>
+                  <a:lnTo>
+                    <a:pt x="4026256" y="2570363"/>
+                  </a:lnTo>
+                  <a:lnTo>
+                    <a:pt x="4097878" y="2591856"/>
+                  </a:lnTo>
+                  <a:lnTo>
+                    <a:pt x="4169501" y="2612844"/>
+                  </a:lnTo>
+                  <a:lnTo>
+                    <a:pt x="4241123" y="2633338"/>
+                  </a:lnTo>
+                  <a:lnTo>
+                    <a:pt x="4312746" y="2653350"/>
+                  </a:lnTo>
+                  <a:lnTo>
+                    <a:pt x="4384368" y="2649627"/>
+                  </a:lnTo>
+                  <a:lnTo>
+                    <a:pt x="4455991" y="2644713"/>
+                  </a:lnTo>
+                  <a:lnTo>
+                    <a:pt x="4527613" y="2639770"/>
+                  </a:lnTo>
+                  <a:lnTo>
+                    <a:pt x="4599236" y="2634798"/>
+                  </a:lnTo>
+                  <a:lnTo>
+                    <a:pt x="4670858" y="2629796"/>
+                  </a:lnTo>
+                  <a:lnTo>
+                    <a:pt x="4742481" y="2624765"/>
+                  </a:lnTo>
+                  <a:lnTo>
+                    <a:pt x="4814104" y="2619705"/>
+                  </a:lnTo>
+                  <a:lnTo>
+                    <a:pt x="4885726" y="2614614"/>
+                  </a:lnTo>
+                  <a:lnTo>
+                    <a:pt x="4957349" y="2609494"/>
+                  </a:lnTo>
+                  <a:lnTo>
+                    <a:pt x="5028971" y="2604343"/>
+                  </a:lnTo>
+                  <a:lnTo>
+                    <a:pt x="5100594" y="2599162"/>
+                  </a:lnTo>
+                  <a:lnTo>
+                    <a:pt x="5172216" y="2593951"/>
+                  </a:lnTo>
+                  <a:lnTo>
+                    <a:pt x="5243839" y="2588709"/>
+                  </a:lnTo>
+                  <a:lnTo>
+                    <a:pt x="5315461" y="2583435"/>
+                  </a:lnTo>
+                  <a:lnTo>
+                    <a:pt x="5387084" y="2578131"/>
+                  </a:lnTo>
+                  <a:lnTo>
+                    <a:pt x="5458706" y="2572796"/>
+                  </a:lnTo>
+                  <a:lnTo>
+                    <a:pt x="5530329" y="2567429"/>
+                  </a:lnTo>
+                  <a:lnTo>
+                    <a:pt x="5601951" y="2562031"/>
+                  </a:lnTo>
+                  <a:lnTo>
+                    <a:pt x="5673574" y="2556600"/>
+                  </a:lnTo>
+                  <a:lnTo>
+                    <a:pt x="5745196" y="2551138"/>
+                  </a:lnTo>
+                  <a:lnTo>
+                    <a:pt x="5816819" y="2545644"/>
+                  </a:lnTo>
+                  <a:lnTo>
+                    <a:pt x="5888441" y="2540117"/>
+                  </a:lnTo>
+                  <a:lnTo>
+                    <a:pt x="5960064" y="2534558"/>
+                  </a:lnTo>
+                  <a:lnTo>
+                    <a:pt x="6031686" y="2528966"/>
+                  </a:lnTo>
+                  <a:lnTo>
+                    <a:pt x="6103309" y="2523341"/>
+                  </a:lnTo>
+                  <a:lnTo>
+                    <a:pt x="6174932" y="2517682"/>
+                  </a:lnTo>
+                  <a:lnTo>
+                    <a:pt x="6246554" y="2511991"/>
+                  </a:lnTo>
+                  <a:lnTo>
+                    <a:pt x="6318177" y="2506266"/>
+                  </a:lnTo>
+                  <a:lnTo>
+                    <a:pt x="6389799" y="2500507"/>
+                  </a:lnTo>
+                  <a:lnTo>
+                    <a:pt x="6461422" y="2494714"/>
+                  </a:lnTo>
+                  <a:lnTo>
+                    <a:pt x="6533044" y="2488888"/>
+                  </a:lnTo>
+                  <a:lnTo>
+                    <a:pt x="6604667" y="2483026"/>
+                  </a:lnTo>
+                  <a:lnTo>
+                    <a:pt x="6676289" y="2477131"/>
+                  </a:lnTo>
+                  <a:lnTo>
+                    <a:pt x="6747912" y="2471200"/>
+                  </a:lnTo>
+                  <a:lnTo>
+                    <a:pt x="6819534" y="2465235"/>
                   </a:lnTo>
                 </a:path>
               </a:pathLst>
@@ -3872,312 +3854,312 @@
           </p:nvSpPr>
           <p:spPr>
             <a:xfrm>
-              <a:off x="1172049" y="4727829"/>
-              <a:ext cx="7090630" cy="453701"/>
+              <a:off x="1172049" y="4728016"/>
+              <a:ext cx="7090630" cy="468391"/>
             </a:xfrm>
             <a:custGeom>
               <a:avLst/>
               <a:pathLst>
-                <a:path w="7090630" h="453701">
+                <a:path w="7090630" h="468391">
                   <a:moveTo>
-                    <a:pt x="7090630" y="453701"/>
+                    <a:pt x="7090630" y="468391"/>
                   </a:moveTo>
                   <a:lnTo>
-                    <a:pt x="7019007" y="445101"/>
-                  </a:lnTo>
-                  <a:lnTo>
-                    <a:pt x="6947385" y="436304"/>
-                  </a:lnTo>
-                  <a:lnTo>
-                    <a:pt x="6875762" y="427306"/>
-                  </a:lnTo>
-                  <a:lnTo>
-                    <a:pt x="6804139" y="418101"/>
-                  </a:lnTo>
-                  <a:lnTo>
-                    <a:pt x="6732517" y="408686"/>
-                  </a:lnTo>
-                  <a:lnTo>
-                    <a:pt x="6660894" y="399056"/>
-                  </a:lnTo>
-                  <a:lnTo>
-                    <a:pt x="6589272" y="389205"/>
-                  </a:lnTo>
-                  <a:lnTo>
-                    <a:pt x="6517649" y="379128"/>
-                  </a:lnTo>
-                  <a:lnTo>
-                    <a:pt x="6446027" y="368821"/>
-                  </a:lnTo>
-                  <a:lnTo>
-                    <a:pt x="6374404" y="358278"/>
-                  </a:lnTo>
-                  <a:lnTo>
-                    <a:pt x="6302782" y="347494"/>
-                  </a:lnTo>
-                  <a:lnTo>
-                    <a:pt x="6231159" y="336462"/>
-                  </a:lnTo>
-                  <a:lnTo>
-                    <a:pt x="6159537" y="325179"/>
-                  </a:lnTo>
-                  <a:lnTo>
-                    <a:pt x="6087914" y="313637"/>
-                  </a:lnTo>
-                  <a:lnTo>
-                    <a:pt x="6016292" y="301830"/>
-                  </a:lnTo>
-                  <a:lnTo>
-                    <a:pt x="5944669" y="289754"/>
-                  </a:lnTo>
-                  <a:lnTo>
-                    <a:pt x="5873047" y="277401"/>
-                  </a:lnTo>
-                  <a:lnTo>
-                    <a:pt x="5801424" y="264765"/>
-                  </a:lnTo>
-                  <a:lnTo>
-                    <a:pt x="5729802" y="251841"/>
-                  </a:lnTo>
-                  <a:lnTo>
-                    <a:pt x="5658179" y="238620"/>
-                  </a:lnTo>
-                  <a:lnTo>
-                    <a:pt x="5586557" y="225096"/>
-                  </a:lnTo>
-                  <a:lnTo>
-                    <a:pt x="5514934" y="211264"/>
-                  </a:lnTo>
-                  <a:lnTo>
-                    <a:pt x="5443311" y="197114"/>
-                  </a:lnTo>
-                  <a:lnTo>
-                    <a:pt x="5371689" y="182641"/>
-                  </a:lnTo>
-                  <a:lnTo>
-                    <a:pt x="5300066" y="167836"/>
-                  </a:lnTo>
-                  <a:lnTo>
-                    <a:pt x="5228444" y="152692"/>
-                  </a:lnTo>
-                  <a:lnTo>
-                    <a:pt x="5156821" y="137202"/>
-                  </a:lnTo>
-                  <a:lnTo>
-                    <a:pt x="5085199" y="121357"/>
-                  </a:lnTo>
-                  <a:lnTo>
-                    <a:pt x="5013576" y="105150"/>
-                  </a:lnTo>
-                  <a:lnTo>
-                    <a:pt x="4941954" y="88571"/>
-                  </a:lnTo>
-                  <a:lnTo>
-                    <a:pt x="4870331" y="71613"/>
-                  </a:lnTo>
-                  <a:lnTo>
-                    <a:pt x="4798709" y="54267"/>
-                  </a:lnTo>
-                  <a:lnTo>
-                    <a:pt x="4727086" y="36524"/>
-                  </a:lnTo>
-                  <a:lnTo>
-                    <a:pt x="4655464" y="18375"/>
+                    <a:pt x="7019007" y="459695"/>
+                  </a:lnTo>
+                  <a:lnTo>
+                    <a:pt x="6947385" y="450790"/>
+                  </a:lnTo>
+                  <a:lnTo>
+                    <a:pt x="6875762" y="441670"/>
+                  </a:lnTo>
+                  <a:lnTo>
+                    <a:pt x="6804139" y="432330"/>
+                  </a:lnTo>
+                  <a:lnTo>
+                    <a:pt x="6732517" y="422765"/>
+                  </a:lnTo>
+                  <a:lnTo>
+                    <a:pt x="6660894" y="412969"/>
+                  </a:lnTo>
+                  <a:lnTo>
+                    <a:pt x="6589272" y="402938"/>
+                  </a:lnTo>
+                  <a:lnTo>
+                    <a:pt x="6517649" y="392664"/>
+                  </a:lnTo>
+                  <a:lnTo>
+                    <a:pt x="6446027" y="382144"/>
+                  </a:lnTo>
+                  <a:lnTo>
+                    <a:pt x="6374404" y="371369"/>
+                  </a:lnTo>
+                  <a:lnTo>
+                    <a:pt x="6302782" y="360335"/>
+                  </a:lnTo>
+                  <a:lnTo>
+                    <a:pt x="6231159" y="349035"/>
+                  </a:lnTo>
+                  <a:lnTo>
+                    <a:pt x="6159537" y="337463"/>
+                  </a:lnTo>
+                  <a:lnTo>
+                    <a:pt x="6087914" y="325612"/>
+                  </a:lnTo>
+                  <a:lnTo>
+                    <a:pt x="6016292" y="313475"/>
+                  </a:lnTo>
+                  <a:lnTo>
+                    <a:pt x="5944669" y="301046"/>
+                  </a:lnTo>
+                  <a:lnTo>
+                    <a:pt x="5873047" y="288317"/>
+                  </a:lnTo>
+                  <a:lnTo>
+                    <a:pt x="5801424" y="275281"/>
+                  </a:lnTo>
+                  <a:lnTo>
+                    <a:pt x="5729802" y="261931"/>
+                  </a:lnTo>
+                  <a:lnTo>
+                    <a:pt x="5658179" y="248260"/>
+                  </a:lnTo>
+                  <a:lnTo>
+                    <a:pt x="5586557" y="234259"/>
+                  </a:lnTo>
+                  <a:lnTo>
+                    <a:pt x="5514934" y="219921"/>
+                  </a:lnTo>
+                  <a:lnTo>
+                    <a:pt x="5443311" y="205237"/>
+                  </a:lnTo>
+                  <a:lnTo>
+                    <a:pt x="5371689" y="190199"/>
+                  </a:lnTo>
+                  <a:lnTo>
+                    <a:pt x="5300066" y="174799"/>
+                  </a:lnTo>
+                  <a:lnTo>
+                    <a:pt x="5228444" y="159028"/>
+                  </a:lnTo>
+                  <a:lnTo>
+                    <a:pt x="5156821" y="142877"/>
+                  </a:lnTo>
+                  <a:lnTo>
+                    <a:pt x="5085199" y="126336"/>
+                  </a:lnTo>
+                  <a:lnTo>
+                    <a:pt x="5013576" y="109397"/>
+                  </a:lnTo>
+                  <a:lnTo>
+                    <a:pt x="4941954" y="92050"/>
+                  </a:lnTo>
+                  <a:lnTo>
+                    <a:pt x="4870331" y="74284"/>
+                  </a:lnTo>
+                  <a:lnTo>
+                    <a:pt x="4798709" y="56091"/>
+                  </a:lnTo>
+                  <a:lnTo>
+                    <a:pt x="4727086" y="37459"/>
+                  </a:lnTo>
+                  <a:lnTo>
+                    <a:pt x="4655464" y="18378"/>
                   </a:lnTo>
                   <a:lnTo>
                     <a:pt x="4583841" y="0"/>
                   </a:lnTo>
                   <a:lnTo>
-                    <a:pt x="4512219" y="5524"/>
-                  </a:lnTo>
-                  <a:lnTo>
-                    <a:pt x="4440596" y="11012"/>
-                  </a:lnTo>
-                  <a:lnTo>
-                    <a:pt x="4368974" y="16463"/>
-                  </a:lnTo>
-                  <a:lnTo>
-                    <a:pt x="4297351" y="21878"/>
-                  </a:lnTo>
-                  <a:lnTo>
-                    <a:pt x="4225729" y="27257"/>
-                  </a:lnTo>
-                  <a:lnTo>
-                    <a:pt x="4154106" y="32600"/>
-                  </a:lnTo>
-                  <a:lnTo>
-                    <a:pt x="4082483" y="37908"/>
-                  </a:lnTo>
-                  <a:lnTo>
-                    <a:pt x="4010861" y="43180"/>
-                  </a:lnTo>
-                  <a:lnTo>
-                    <a:pt x="3939238" y="48417"/>
-                  </a:lnTo>
-                  <a:lnTo>
-                    <a:pt x="3867616" y="53619"/>
-                  </a:lnTo>
-                  <a:lnTo>
-                    <a:pt x="3795993" y="58786"/>
-                  </a:lnTo>
-                  <a:lnTo>
-                    <a:pt x="3724371" y="63919"/>
-                  </a:lnTo>
-                  <a:lnTo>
-                    <a:pt x="3652748" y="69018"/>
-                  </a:lnTo>
-                  <a:lnTo>
-                    <a:pt x="3581126" y="74083"/>
-                  </a:lnTo>
-                  <a:lnTo>
-                    <a:pt x="3509503" y="79114"/>
-                  </a:lnTo>
-                  <a:lnTo>
-                    <a:pt x="3437881" y="84112"/>
-                  </a:lnTo>
-                  <a:lnTo>
-                    <a:pt x="3366258" y="89076"/>
-                  </a:lnTo>
-                  <a:lnTo>
-                    <a:pt x="3294636" y="94007"/>
-                  </a:lnTo>
-                  <a:lnTo>
-                    <a:pt x="3223013" y="98906"/>
-                  </a:lnTo>
-                  <a:lnTo>
-                    <a:pt x="3151391" y="103772"/>
-                  </a:lnTo>
-                  <a:lnTo>
-                    <a:pt x="3079768" y="108605"/>
-                  </a:lnTo>
-                  <a:lnTo>
-                    <a:pt x="3008146" y="113406"/>
-                  </a:lnTo>
-                  <a:lnTo>
-                    <a:pt x="2936523" y="118176"/>
-                  </a:lnTo>
-                  <a:lnTo>
-                    <a:pt x="2864901" y="122913"/>
-                  </a:lnTo>
-                  <a:lnTo>
-                    <a:pt x="2793278" y="127619"/>
-                  </a:lnTo>
-                  <a:lnTo>
-                    <a:pt x="2721655" y="132294"/>
-                  </a:lnTo>
-                  <a:lnTo>
-                    <a:pt x="2650033" y="136937"/>
-                  </a:lnTo>
-                  <a:lnTo>
-                    <a:pt x="2578410" y="141549"/>
-                  </a:lnTo>
-                  <a:lnTo>
-                    <a:pt x="2506788" y="146131"/>
-                  </a:lnTo>
-                  <a:lnTo>
-                    <a:pt x="2435165" y="150682"/>
-                  </a:lnTo>
-                  <a:lnTo>
-                    <a:pt x="2363543" y="155203"/>
-                  </a:lnTo>
-                  <a:lnTo>
-                    <a:pt x="2291920" y="159694"/>
-                  </a:lnTo>
-                  <a:lnTo>
-                    <a:pt x="2220298" y="164155"/>
-                  </a:lnTo>
-                  <a:lnTo>
-                    <a:pt x="2148675" y="168586"/>
-                  </a:lnTo>
-                  <a:lnTo>
-                    <a:pt x="2077053" y="172988"/>
-                  </a:lnTo>
-                  <a:lnTo>
-                    <a:pt x="2005430" y="177360"/>
-                  </a:lnTo>
-                  <a:lnTo>
-                    <a:pt x="1933808" y="181704"/>
-                  </a:lnTo>
-                  <a:lnTo>
-                    <a:pt x="1862185" y="186018"/>
-                  </a:lnTo>
-                  <a:lnTo>
-                    <a:pt x="1790563" y="190304"/>
-                  </a:lnTo>
-                  <a:lnTo>
-                    <a:pt x="1718940" y="194561"/>
-                  </a:lnTo>
-                  <a:lnTo>
-                    <a:pt x="1647318" y="198789"/>
-                  </a:lnTo>
-                  <a:lnTo>
-                    <a:pt x="1575695" y="202990"/>
-                  </a:lnTo>
-                  <a:lnTo>
-                    <a:pt x="1504073" y="207162"/>
-                  </a:lnTo>
-                  <a:lnTo>
-                    <a:pt x="1432450" y="211307"/>
-                  </a:lnTo>
-                  <a:lnTo>
-                    <a:pt x="1360827" y="215424"/>
-                  </a:lnTo>
-                  <a:lnTo>
-                    <a:pt x="1289205" y="219514"/>
-                  </a:lnTo>
-                  <a:lnTo>
-                    <a:pt x="1217582" y="223576"/>
-                  </a:lnTo>
-                  <a:lnTo>
-                    <a:pt x="1145960" y="227612"/>
-                  </a:lnTo>
-                  <a:lnTo>
-                    <a:pt x="1074337" y="231620"/>
-                  </a:lnTo>
-                  <a:lnTo>
-                    <a:pt x="1002715" y="235602"/>
-                  </a:lnTo>
-                  <a:lnTo>
-                    <a:pt x="931092" y="239557"/>
-                  </a:lnTo>
-                  <a:lnTo>
-                    <a:pt x="859470" y="243486"/>
-                  </a:lnTo>
-                  <a:lnTo>
-                    <a:pt x="787847" y="247389"/>
-                  </a:lnTo>
-                  <a:lnTo>
-                    <a:pt x="716225" y="251266"/>
-                  </a:lnTo>
-                  <a:lnTo>
-                    <a:pt x="644602" y="255117"/>
-                  </a:lnTo>
-                  <a:lnTo>
-                    <a:pt x="572980" y="258942"/>
-                  </a:lnTo>
-                  <a:lnTo>
-                    <a:pt x="501357" y="262742"/>
-                  </a:lnTo>
-                  <a:lnTo>
-                    <a:pt x="429735" y="266517"/>
-                  </a:lnTo>
-                  <a:lnTo>
-                    <a:pt x="358112" y="270266"/>
-                  </a:lnTo>
-                  <a:lnTo>
-                    <a:pt x="286490" y="273990"/>
-                  </a:lnTo>
-                  <a:lnTo>
-                    <a:pt x="214867" y="277690"/>
-                  </a:lnTo>
-                  <a:lnTo>
-                    <a:pt x="143245" y="281365"/>
-                  </a:lnTo>
-                  <a:lnTo>
-                    <a:pt x="71622" y="285016"/>
-                  </a:lnTo>
-                  <a:lnTo>
-                    <a:pt x="0" y="288642"/>
+                    <a:pt x="4512219" y="4856"/>
+                  </a:lnTo>
+                  <a:lnTo>
+                    <a:pt x="4440596" y="9685"/>
+                  </a:lnTo>
+                  <a:lnTo>
+                    <a:pt x="4368974" y="14485"/>
+                  </a:lnTo>
+                  <a:lnTo>
+                    <a:pt x="4297351" y="19257"/>
+                  </a:lnTo>
+                  <a:lnTo>
+                    <a:pt x="4225729" y="24001"/>
+                  </a:lnTo>
+                  <a:lnTo>
+                    <a:pt x="4154106" y="28717"/>
+                  </a:lnTo>
+                  <a:lnTo>
+                    <a:pt x="4082483" y="33405"/>
+                  </a:lnTo>
+                  <a:lnTo>
+                    <a:pt x="4010861" y="38066"/>
+                  </a:lnTo>
+                  <a:lnTo>
+                    <a:pt x="3939238" y="42700"/>
+                  </a:lnTo>
+                  <a:lnTo>
+                    <a:pt x="3867616" y="47307"/>
+                  </a:lnTo>
+                  <a:lnTo>
+                    <a:pt x="3795993" y="51887"/>
+                  </a:lnTo>
+                  <a:lnTo>
+                    <a:pt x="3724371" y="56440"/>
+                  </a:lnTo>
+                  <a:lnTo>
+                    <a:pt x="3652748" y="60966"/>
+                  </a:lnTo>
+                  <a:lnTo>
+                    <a:pt x="3581126" y="65465"/>
+                  </a:lnTo>
+                  <a:lnTo>
+                    <a:pt x="3509503" y="69939"/>
+                  </a:lnTo>
+                  <a:lnTo>
+                    <a:pt x="3437881" y="74386"/>
+                  </a:lnTo>
+                  <a:lnTo>
+                    <a:pt x="3366258" y="78807"/>
+                  </a:lnTo>
+                  <a:lnTo>
+                    <a:pt x="3294636" y="83202"/>
+                  </a:lnTo>
+                  <a:lnTo>
+                    <a:pt x="3223013" y="87572"/>
+                  </a:lnTo>
+                  <a:lnTo>
+                    <a:pt x="3151391" y="91916"/>
+                  </a:lnTo>
+                  <a:lnTo>
+                    <a:pt x="3079768" y="96234"/>
+                  </a:lnTo>
+                  <a:lnTo>
+                    <a:pt x="3008146" y="100527"/>
+                  </a:lnTo>
+                  <a:lnTo>
+                    <a:pt x="2936523" y="104795"/>
+                  </a:lnTo>
+                  <a:lnTo>
+                    <a:pt x="2864901" y="109038"/>
+                  </a:lnTo>
+                  <a:lnTo>
+                    <a:pt x="2793278" y="113256"/>
+                  </a:lnTo>
+                  <a:lnTo>
+                    <a:pt x="2721655" y="117450"/>
+                  </a:lnTo>
+                  <a:lnTo>
+                    <a:pt x="2650033" y="121619"/>
+                  </a:lnTo>
+                  <a:lnTo>
+                    <a:pt x="2578410" y="125763"/>
+                  </a:lnTo>
+                  <a:lnTo>
+                    <a:pt x="2506788" y="129883"/>
+                  </a:lnTo>
+                  <a:lnTo>
+                    <a:pt x="2435165" y="133979"/>
+                  </a:lnTo>
+                  <a:lnTo>
+                    <a:pt x="2363543" y="138051"/>
+                  </a:lnTo>
+                  <a:lnTo>
+                    <a:pt x="2291920" y="142099"/>
+                  </a:lnTo>
+                  <a:lnTo>
+                    <a:pt x="2220298" y="146124"/>
+                  </a:lnTo>
+                  <a:lnTo>
+                    <a:pt x="2148675" y="150125"/>
+                  </a:lnTo>
+                  <a:lnTo>
+                    <a:pt x="2077053" y="154102"/>
+                  </a:lnTo>
+                  <a:lnTo>
+                    <a:pt x="2005430" y="158057"/>
+                  </a:lnTo>
+                  <a:lnTo>
+                    <a:pt x="1933808" y="161988"/>
+                  </a:lnTo>
+                  <a:lnTo>
+                    <a:pt x="1862185" y="165896"/>
+                  </a:lnTo>
+                  <a:lnTo>
+                    <a:pt x="1790563" y="169781"/>
+                  </a:lnTo>
+                  <a:lnTo>
+                    <a:pt x="1718940" y="173643"/>
+                  </a:lnTo>
+                  <a:lnTo>
+                    <a:pt x="1647318" y="177483"/>
+                  </a:lnTo>
+                  <a:lnTo>
+                    <a:pt x="1575695" y="181300"/>
+                  </a:lnTo>
+                  <a:lnTo>
+                    <a:pt x="1504073" y="185095"/>
+                  </a:lnTo>
+                  <a:lnTo>
+                    <a:pt x="1432450" y="188868"/>
+                  </a:lnTo>
+                  <a:lnTo>
+                    <a:pt x="1360827" y="192618"/>
+                  </a:lnTo>
+                  <a:lnTo>
+                    <a:pt x="1289205" y="196347"/>
+                  </a:lnTo>
+                  <a:lnTo>
+                    <a:pt x="1217582" y="200054"/>
+                  </a:lnTo>
+                  <a:lnTo>
+                    <a:pt x="1145960" y="203739"/>
+                  </a:lnTo>
+                  <a:lnTo>
+                    <a:pt x="1074337" y="207402"/>
+                  </a:lnTo>
+                  <a:lnTo>
+                    <a:pt x="1002715" y="211044"/>
+                  </a:lnTo>
+                  <a:lnTo>
+                    <a:pt x="931092" y="214665"/>
+                  </a:lnTo>
+                  <a:lnTo>
+                    <a:pt x="859470" y="218265"/>
+                  </a:lnTo>
+                  <a:lnTo>
+                    <a:pt x="787847" y="221843"/>
+                  </a:lnTo>
+                  <a:lnTo>
+                    <a:pt x="716225" y="225400"/>
+                  </a:lnTo>
+                  <a:lnTo>
+                    <a:pt x="644602" y="228937"/>
+                  </a:lnTo>
+                  <a:lnTo>
+                    <a:pt x="572980" y="232453"/>
+                  </a:lnTo>
+                  <a:lnTo>
+                    <a:pt x="501357" y="235948"/>
+                  </a:lnTo>
+                  <a:lnTo>
+                    <a:pt x="429735" y="239423"/>
+                  </a:lnTo>
+                  <a:lnTo>
+                    <a:pt x="358112" y="242877"/>
+                  </a:lnTo>
+                  <a:lnTo>
+                    <a:pt x="286490" y="246312"/>
+                  </a:lnTo>
+                  <a:lnTo>
+                    <a:pt x="214867" y="249726"/>
+                  </a:lnTo>
+                  <a:lnTo>
+                    <a:pt x="143245" y="253120"/>
+                  </a:lnTo>
+                  <a:lnTo>
+                    <a:pt x="71622" y="256494"/>
+                  </a:lnTo>
+                  <a:lnTo>
+                    <a:pt x="0" y="259849"/>
                   </a:lnTo>
                 </a:path>
               </a:pathLst>
@@ -4197,312 +4179,312 @@
           </p:nvSpPr>
           <p:spPr>
             <a:xfrm>
-              <a:off x="1172049" y="4175368"/>
-              <a:ext cx="7090630" cy="754385"/>
+              <a:off x="1172049" y="4083960"/>
+              <a:ext cx="7090630" cy="867053"/>
             </a:xfrm>
             <a:custGeom>
               <a:avLst/>
               <a:pathLst>
-                <a:path w="7090630" h="754385">
+                <a:path w="7090630" h="867053">
                   <a:moveTo>
                     <a:pt x="0" y="0"/>
                   </a:moveTo>
                   <a:lnTo>
-                    <a:pt x="71622" y="10975"/>
-                  </a:lnTo>
-                  <a:lnTo>
-                    <a:pt x="143245" y="21864"/>
-                  </a:lnTo>
-                  <a:lnTo>
-                    <a:pt x="214867" y="32666"/>
-                  </a:lnTo>
-                  <a:lnTo>
-                    <a:pt x="286490" y="43382"/>
-                  </a:lnTo>
-                  <a:lnTo>
-                    <a:pt x="358112" y="54014"/>
-                  </a:lnTo>
-                  <a:lnTo>
-                    <a:pt x="429735" y="64561"/>
-                  </a:lnTo>
-                  <a:lnTo>
-                    <a:pt x="501357" y="75024"/>
-                  </a:lnTo>
-                  <a:lnTo>
-                    <a:pt x="572980" y="85404"/>
-                  </a:lnTo>
-                  <a:lnTo>
-                    <a:pt x="644602" y="95701"/>
-                  </a:lnTo>
-                  <a:lnTo>
-                    <a:pt x="716225" y="105917"/>
-                  </a:lnTo>
-                  <a:lnTo>
-                    <a:pt x="787847" y="116051"/>
-                  </a:lnTo>
-                  <a:lnTo>
-                    <a:pt x="859470" y="126105"/>
-                  </a:lnTo>
-                  <a:lnTo>
-                    <a:pt x="931092" y="136080"/>
-                  </a:lnTo>
-                  <a:lnTo>
-                    <a:pt x="1002715" y="145974"/>
-                  </a:lnTo>
-                  <a:lnTo>
-                    <a:pt x="1074337" y="155791"/>
-                  </a:lnTo>
-                  <a:lnTo>
-                    <a:pt x="1145960" y="165529"/>
-                  </a:lnTo>
-                  <a:lnTo>
-                    <a:pt x="1217582" y="175190"/>
-                  </a:lnTo>
-                  <a:lnTo>
-                    <a:pt x="1289205" y="184775"/>
-                  </a:lnTo>
-                  <a:lnTo>
-                    <a:pt x="1360827" y="194283"/>
-                  </a:lnTo>
-                  <a:lnTo>
-                    <a:pt x="1432450" y="203716"/>
-                  </a:lnTo>
-                  <a:lnTo>
-                    <a:pt x="1504073" y="213073"/>
-                  </a:lnTo>
-                  <a:lnTo>
-                    <a:pt x="1575695" y="222357"/>
-                  </a:lnTo>
-                  <a:lnTo>
-                    <a:pt x="1647318" y="231567"/>
-                  </a:lnTo>
-                  <a:lnTo>
-                    <a:pt x="1718940" y="240703"/>
-                  </a:lnTo>
-                  <a:lnTo>
-                    <a:pt x="1790563" y="249767"/>
-                  </a:lnTo>
-                  <a:lnTo>
-                    <a:pt x="1862185" y="258759"/>
-                  </a:lnTo>
-                  <a:lnTo>
-                    <a:pt x="1933808" y="267680"/>
-                  </a:lnTo>
-                  <a:lnTo>
-                    <a:pt x="2005430" y="276529"/>
-                  </a:lnTo>
-                  <a:lnTo>
-                    <a:pt x="2077053" y="285309"/>
-                  </a:lnTo>
-                  <a:lnTo>
-                    <a:pt x="2148675" y="294019"/>
-                  </a:lnTo>
-                  <a:lnTo>
-                    <a:pt x="2220298" y="302659"/>
-                  </a:lnTo>
-                  <a:lnTo>
-                    <a:pt x="2291920" y="311231"/>
-                  </a:lnTo>
-                  <a:lnTo>
-                    <a:pt x="2363543" y="319735"/>
-                  </a:lnTo>
-                  <a:lnTo>
-                    <a:pt x="2435165" y="328171"/>
-                  </a:lnTo>
-                  <a:lnTo>
-                    <a:pt x="2506788" y="336540"/>
-                  </a:lnTo>
-                  <a:lnTo>
-                    <a:pt x="2578410" y="344843"/>
-                  </a:lnTo>
-                  <a:lnTo>
-                    <a:pt x="2650033" y="353080"/>
-                  </a:lnTo>
-                  <a:lnTo>
-                    <a:pt x="2721655" y="361251"/>
-                  </a:lnTo>
-                  <a:lnTo>
-                    <a:pt x="2793278" y="369358"/>
-                  </a:lnTo>
-                  <a:lnTo>
-                    <a:pt x="2864901" y="377400"/>
-                  </a:lnTo>
-                  <a:lnTo>
-                    <a:pt x="2936523" y="385378"/>
-                  </a:lnTo>
-                  <a:lnTo>
-                    <a:pt x="3008146" y="393293"/>
-                  </a:lnTo>
-                  <a:lnTo>
-                    <a:pt x="3079768" y="401145"/>
-                  </a:lnTo>
-                  <a:lnTo>
-                    <a:pt x="3151391" y="408935"/>
-                  </a:lnTo>
-                  <a:lnTo>
-                    <a:pt x="3223013" y="416663"/>
-                  </a:lnTo>
-                  <a:lnTo>
-                    <a:pt x="3294636" y="424329"/>
-                  </a:lnTo>
-                  <a:lnTo>
-                    <a:pt x="3366258" y="431935"/>
-                  </a:lnTo>
-                  <a:lnTo>
-                    <a:pt x="3437881" y="439480"/>
-                  </a:lnTo>
-                  <a:lnTo>
-                    <a:pt x="3509503" y="446965"/>
-                  </a:lnTo>
-                  <a:lnTo>
-                    <a:pt x="3581126" y="454391"/>
-                  </a:lnTo>
-                  <a:lnTo>
-                    <a:pt x="3652748" y="461757"/>
-                  </a:lnTo>
-                  <a:lnTo>
-                    <a:pt x="3724371" y="469066"/>
-                  </a:lnTo>
-                  <a:lnTo>
-                    <a:pt x="3795993" y="476316"/>
-                  </a:lnTo>
-                  <a:lnTo>
-                    <a:pt x="3867616" y="483508"/>
-                  </a:lnTo>
-                  <a:lnTo>
-                    <a:pt x="3939238" y="490644"/>
-                  </a:lnTo>
-                  <a:lnTo>
-                    <a:pt x="4010861" y="497723"/>
-                  </a:lnTo>
-                  <a:lnTo>
-                    <a:pt x="4082483" y="504745"/>
-                  </a:lnTo>
-                  <a:lnTo>
-                    <a:pt x="4154106" y="511712"/>
-                  </a:lnTo>
-                  <a:lnTo>
-                    <a:pt x="4225729" y="518623"/>
-                  </a:lnTo>
-                  <a:lnTo>
-                    <a:pt x="4297351" y="525480"/>
-                  </a:lnTo>
-                  <a:lnTo>
-                    <a:pt x="4368974" y="532282"/>
-                  </a:lnTo>
-                  <a:lnTo>
-                    <a:pt x="4440596" y="539030"/>
-                  </a:lnTo>
-                  <a:lnTo>
-                    <a:pt x="4512219" y="545725"/>
-                  </a:lnTo>
-                  <a:lnTo>
-                    <a:pt x="4583841" y="552366"/>
-                  </a:lnTo>
-                  <a:lnTo>
-                    <a:pt x="4655464" y="558955"/>
-                  </a:lnTo>
-                  <a:lnTo>
-                    <a:pt x="4727086" y="565491"/>
-                  </a:lnTo>
-                  <a:lnTo>
-                    <a:pt x="4798709" y="571975"/>
-                  </a:lnTo>
-                  <a:lnTo>
-                    <a:pt x="4870331" y="578408"/>
-                  </a:lnTo>
-                  <a:lnTo>
-                    <a:pt x="4941954" y="584790"/>
-                  </a:lnTo>
-                  <a:lnTo>
-                    <a:pt x="5013576" y="591121"/>
-                  </a:lnTo>
-                  <a:lnTo>
-                    <a:pt x="5085199" y="597401"/>
-                  </a:lnTo>
-                  <a:lnTo>
-                    <a:pt x="5156821" y="603632"/>
-                  </a:lnTo>
-                  <a:lnTo>
-                    <a:pt x="5228444" y="609814"/>
-                  </a:lnTo>
-                  <a:lnTo>
-                    <a:pt x="5300066" y="615946"/>
-                  </a:lnTo>
-                  <a:lnTo>
-                    <a:pt x="5371689" y="622029"/>
-                  </a:lnTo>
-                  <a:lnTo>
-                    <a:pt x="5443311" y="628065"/>
-                  </a:lnTo>
-                  <a:lnTo>
-                    <a:pt x="5514934" y="634052"/>
-                  </a:lnTo>
-                  <a:lnTo>
-                    <a:pt x="5586557" y="639992"/>
-                  </a:lnTo>
-                  <a:lnTo>
-                    <a:pt x="5658179" y="645884"/>
-                  </a:lnTo>
-                  <a:lnTo>
-                    <a:pt x="5729802" y="651730"/>
-                  </a:lnTo>
-                  <a:lnTo>
-                    <a:pt x="5801424" y="657529"/>
-                  </a:lnTo>
-                  <a:lnTo>
-                    <a:pt x="5873047" y="663283"/>
-                  </a:lnTo>
-                  <a:lnTo>
-                    <a:pt x="5944669" y="668990"/>
-                  </a:lnTo>
-                  <a:lnTo>
-                    <a:pt x="6016292" y="674653"/>
-                  </a:lnTo>
-                  <a:lnTo>
-                    <a:pt x="6087914" y="680270"/>
-                  </a:lnTo>
-                  <a:lnTo>
-                    <a:pt x="6159537" y="685843"/>
-                  </a:lnTo>
-                  <a:lnTo>
-                    <a:pt x="6231159" y="691371"/>
-                  </a:lnTo>
-                  <a:lnTo>
-                    <a:pt x="6302782" y="696855"/>
-                  </a:lnTo>
-                  <a:lnTo>
-                    <a:pt x="6374404" y="702296"/>
-                  </a:lnTo>
-                  <a:lnTo>
-                    <a:pt x="6446027" y="707694"/>
-                  </a:lnTo>
-                  <a:lnTo>
-                    <a:pt x="6517649" y="713049"/>
-                  </a:lnTo>
-                  <a:lnTo>
-                    <a:pt x="6589272" y="718361"/>
-                  </a:lnTo>
-                  <a:lnTo>
-                    <a:pt x="6660894" y="723631"/>
-                  </a:lnTo>
-                  <a:lnTo>
-                    <a:pt x="6732517" y="728860"/>
-                  </a:lnTo>
-                  <a:lnTo>
-                    <a:pt x="6804139" y="734046"/>
-                  </a:lnTo>
-                  <a:lnTo>
-                    <a:pt x="6875762" y="739192"/>
-                  </a:lnTo>
-                  <a:lnTo>
-                    <a:pt x="6947385" y="744297"/>
-                  </a:lnTo>
-                  <a:lnTo>
-                    <a:pt x="7019007" y="749361"/>
-                  </a:lnTo>
-                  <a:lnTo>
-                    <a:pt x="7090630" y="754385"/>
+                    <a:pt x="71622" y="13155"/>
+                  </a:lnTo>
+                  <a:lnTo>
+                    <a:pt x="143245" y="26193"/>
+                  </a:lnTo>
+                  <a:lnTo>
+                    <a:pt x="214867" y="39115"/>
+                  </a:lnTo>
+                  <a:lnTo>
+                    <a:pt x="286490" y="51921"/>
+                  </a:lnTo>
+                  <a:lnTo>
+                    <a:pt x="358112" y="64613"/>
+                  </a:lnTo>
+                  <a:lnTo>
+                    <a:pt x="429735" y="77192"/>
+                  </a:lnTo>
+                  <a:lnTo>
+                    <a:pt x="501357" y="89658"/>
+                  </a:lnTo>
+                  <a:lnTo>
+                    <a:pt x="572980" y="102013"/>
+                  </a:lnTo>
+                  <a:lnTo>
+                    <a:pt x="644602" y="114258"/>
+                  </a:lnTo>
+                  <a:lnTo>
+                    <a:pt x="716225" y="126394"/>
+                  </a:lnTo>
+                  <a:lnTo>
+                    <a:pt x="787847" y="138421"/>
+                  </a:lnTo>
+                  <a:lnTo>
+                    <a:pt x="859470" y="150340"/>
+                  </a:lnTo>
+                  <a:lnTo>
+                    <a:pt x="931092" y="162153"/>
+                  </a:lnTo>
+                  <a:lnTo>
+                    <a:pt x="1002715" y="173861"/>
+                  </a:lnTo>
+                  <a:lnTo>
+                    <a:pt x="1074337" y="185464"/>
+                  </a:lnTo>
+                  <a:lnTo>
+                    <a:pt x="1145960" y="196964"/>
+                  </a:lnTo>
+                  <a:lnTo>
+                    <a:pt x="1217582" y="208361"/>
+                  </a:lnTo>
+                  <a:lnTo>
+                    <a:pt x="1289205" y="219656"/>
+                  </a:lnTo>
+                  <a:lnTo>
+                    <a:pt x="1360827" y="230850"/>
+                  </a:lnTo>
+                  <a:lnTo>
+                    <a:pt x="1432450" y="241944"/>
+                  </a:lnTo>
+                  <a:lnTo>
+                    <a:pt x="1504073" y="252939"/>
+                  </a:lnTo>
+                  <a:lnTo>
+                    <a:pt x="1575695" y="263836"/>
+                  </a:lnTo>
+                  <a:lnTo>
+                    <a:pt x="1647318" y="274636"/>
+                  </a:lnTo>
+                  <a:lnTo>
+                    <a:pt x="1718940" y="285339"/>
+                  </a:lnTo>
+                  <a:lnTo>
+                    <a:pt x="1790563" y="295947"/>
+                  </a:lnTo>
+                  <a:lnTo>
+                    <a:pt x="1862185" y="306460"/>
+                  </a:lnTo>
+                  <a:lnTo>
+                    <a:pt x="1933808" y="316879"/>
+                  </a:lnTo>
+                  <a:lnTo>
+                    <a:pt x="2005430" y="327205"/>
+                  </a:lnTo>
+                  <a:lnTo>
+                    <a:pt x="2077053" y="337439"/>
+                  </a:lnTo>
+                  <a:lnTo>
+                    <a:pt x="2148675" y="347582"/>
+                  </a:lnTo>
+                  <a:lnTo>
+                    <a:pt x="2220298" y="357634"/>
+                  </a:lnTo>
+                  <a:lnTo>
+                    <a:pt x="2291920" y="367596"/>
+                  </a:lnTo>
+                  <a:lnTo>
+                    <a:pt x="2363543" y="377469"/>
+                  </a:lnTo>
+                  <a:lnTo>
+                    <a:pt x="2435165" y="387254"/>
+                  </a:lnTo>
+                  <a:lnTo>
+                    <a:pt x="2506788" y="396952"/>
+                  </a:lnTo>
+                  <a:lnTo>
+                    <a:pt x="2578410" y="406563"/>
+                  </a:lnTo>
+                  <a:lnTo>
+                    <a:pt x="2650033" y="416088"/>
+                  </a:lnTo>
+                  <a:lnTo>
+                    <a:pt x="2721655" y="425528"/>
+                  </a:lnTo>
+                  <a:lnTo>
+                    <a:pt x="2793278" y="434884"/>
+                  </a:lnTo>
+                  <a:lnTo>
+                    <a:pt x="2864901" y="444157"/>
+                  </a:lnTo>
+                  <a:lnTo>
+                    <a:pt x="2936523" y="453346"/>
+                  </a:lnTo>
+                  <a:lnTo>
+                    <a:pt x="3008146" y="462454"/>
+                  </a:lnTo>
+                  <a:lnTo>
+                    <a:pt x="3079768" y="471480"/>
+                  </a:lnTo>
+                  <a:lnTo>
+                    <a:pt x="3151391" y="480425"/>
+                  </a:lnTo>
+                  <a:lnTo>
+                    <a:pt x="3223013" y="489291"/>
+                  </a:lnTo>
+                  <a:lnTo>
+                    <a:pt x="3294636" y="498078"/>
+                  </a:lnTo>
+                  <a:lnTo>
+                    <a:pt x="3366258" y="506786"/>
+                  </a:lnTo>
+                  <a:lnTo>
+                    <a:pt x="3437881" y="515416"/>
+                  </a:lnTo>
+                  <a:lnTo>
+                    <a:pt x="3509503" y="523969"/>
+                  </a:lnTo>
+                  <a:lnTo>
+                    <a:pt x="3581126" y="532446"/>
+                  </a:lnTo>
+                  <a:lnTo>
+                    <a:pt x="3652748" y="540847"/>
+                  </a:lnTo>
+                  <a:lnTo>
+                    <a:pt x="3724371" y="549174"/>
+                  </a:lnTo>
+                  <a:lnTo>
+                    <a:pt x="3795993" y="557425"/>
+                  </a:lnTo>
+                  <a:lnTo>
+                    <a:pt x="3867616" y="565604"/>
+                  </a:lnTo>
+                  <a:lnTo>
+                    <a:pt x="3939238" y="573709"/>
+                  </a:lnTo>
+                  <a:lnTo>
+                    <a:pt x="4010861" y="581741"/>
+                  </a:lnTo>
+                  <a:lnTo>
+                    <a:pt x="4082483" y="589702"/>
+                  </a:lnTo>
+                  <a:lnTo>
+                    <a:pt x="4154106" y="597592"/>
+                  </a:lnTo>
+                  <a:lnTo>
+                    <a:pt x="4225729" y="605412"/>
+                  </a:lnTo>
+                  <a:lnTo>
+                    <a:pt x="4297351" y="613161"/>
+                  </a:lnTo>
+                  <a:lnTo>
+                    <a:pt x="4368974" y="620842"/>
+                  </a:lnTo>
+                  <a:lnTo>
+                    <a:pt x="4440596" y="628454"/>
+                  </a:lnTo>
+                  <a:lnTo>
+                    <a:pt x="4512219" y="635998"/>
+                  </a:lnTo>
+                  <a:lnTo>
+                    <a:pt x="4583841" y="643474"/>
+                  </a:lnTo>
+                  <a:lnTo>
+                    <a:pt x="4655464" y="650884"/>
+                  </a:lnTo>
+                  <a:lnTo>
+                    <a:pt x="4727086" y="658228"/>
+                  </a:lnTo>
+                  <a:lnTo>
+                    <a:pt x="4798709" y="665506"/>
+                  </a:lnTo>
+                  <a:lnTo>
+                    <a:pt x="4870331" y="672719"/>
+                  </a:lnTo>
+                  <a:lnTo>
+                    <a:pt x="4941954" y="679867"/>
+                  </a:lnTo>
+                  <a:lnTo>
+                    <a:pt x="5013576" y="686952"/>
+                  </a:lnTo>
+                  <a:lnTo>
+                    <a:pt x="5085199" y="693974"/>
+                  </a:lnTo>
+                  <a:lnTo>
+                    <a:pt x="5156821" y="700932"/>
+                  </a:lnTo>
+                  <a:lnTo>
+                    <a:pt x="5228444" y="707829"/>
+                  </a:lnTo>
+                  <a:lnTo>
+                    <a:pt x="5300066" y="714664"/>
+                  </a:lnTo>
+                  <a:lnTo>
+                    <a:pt x="5371689" y="721438"/>
+                  </a:lnTo>
+                  <a:lnTo>
+                    <a:pt x="5443311" y="728152"/>
+                  </a:lnTo>
+                  <a:lnTo>
+                    <a:pt x="5514934" y="734806"/>
+                  </a:lnTo>
+                  <a:lnTo>
+                    <a:pt x="5586557" y="741400"/>
+                  </a:lnTo>
+                  <a:lnTo>
+                    <a:pt x="5658179" y="747935"/>
+                  </a:lnTo>
+                  <a:lnTo>
+                    <a:pt x="5729802" y="754412"/>
+                  </a:lnTo>
+                  <a:lnTo>
+                    <a:pt x="5801424" y="760831"/>
+                  </a:lnTo>
+                  <a:lnTo>
+                    <a:pt x="5873047" y="767193"/>
+                  </a:lnTo>
+                  <a:lnTo>
+                    <a:pt x="5944669" y="773498"/>
+                  </a:lnTo>
+                  <a:lnTo>
+                    <a:pt x="6016292" y="779747"/>
+                  </a:lnTo>
+                  <a:lnTo>
+                    <a:pt x="6087914" y="785940"/>
+                  </a:lnTo>
+                  <a:lnTo>
+                    <a:pt x="6159537" y="792078"/>
+                  </a:lnTo>
+                  <a:lnTo>
+                    <a:pt x="6231159" y="798160"/>
+                  </a:lnTo>
+                  <a:lnTo>
+                    <a:pt x="6302782" y="804189"/>
+                  </a:lnTo>
+                  <a:lnTo>
+                    <a:pt x="6374404" y="810164"/>
+                  </a:lnTo>
+                  <a:lnTo>
+                    <a:pt x="6446027" y="816085"/>
+                  </a:lnTo>
+                  <a:lnTo>
+                    <a:pt x="6517649" y="821953"/>
+                  </a:lnTo>
+                  <a:lnTo>
+                    <a:pt x="6589272" y="827769"/>
+                  </a:lnTo>
+                  <a:lnTo>
+                    <a:pt x="6660894" y="833534"/>
+                  </a:lnTo>
+                  <a:lnTo>
+                    <a:pt x="6732517" y="839246"/>
+                  </a:lnTo>
+                  <a:lnTo>
+                    <a:pt x="6804139" y="844908"/>
+                  </a:lnTo>
+                  <a:lnTo>
+                    <a:pt x="6875762" y="850519"/>
+                  </a:lnTo>
+                  <a:lnTo>
+                    <a:pt x="6947385" y="856080"/>
+                  </a:lnTo>
+                  <a:lnTo>
+                    <a:pt x="7019007" y="861591"/>
+                  </a:lnTo>
+                  <a:lnTo>
+                    <a:pt x="7090630" y="867053"/>
                   </a:lnTo>
                 </a:path>
               </a:pathLst>
@@ -4574,7 +4556,7 @@
           </p:nvSpPr>
           <p:spPr>
             <a:xfrm>
-              <a:off x="5756448" y="2073503"/>
+              <a:off x="5759271" y="2073503"/>
               <a:ext cx="0" cy="3649639"/>
             </a:xfrm>
             <a:custGeom>
@@ -4617,7 +4599,7 @@
           </p:nvSpPr>
           <p:spPr>
             <a:xfrm>
-              <a:off x="4469314" y="2073503"/>
+              <a:off x="4504692" y="2073503"/>
               <a:ext cx="0" cy="3649639"/>
             </a:xfrm>
             <a:custGeom>
@@ -4660,7 +4642,7 @@
           </p:nvSpPr>
           <p:spPr>
             <a:xfrm>
-              <a:off x="6872676" y="2073503"/>
+              <a:off x="6871070" y="2073503"/>
               <a:ext cx="0" cy="3649639"/>
             </a:xfrm>
             <a:custGeom>
@@ -4933,7 +4915,7 @@
           </p:nvSpPr>
           <p:spPr>
             <a:xfrm>
-              <a:off x="3199861" y="5785772"/>
+              <a:off x="3201825" y="5785772"/>
               <a:ext cx="161574" cy="80101"/>
             </a:xfrm>
             <a:prstGeom prst="rect">
@@ -4979,7 +4961,7 @@
           </p:nvSpPr>
           <p:spPr>
             <a:xfrm>
-              <a:off x="5730225" y="5785772"/>
+              <a:off x="5727471" y="5785772"/>
               <a:ext cx="62179" cy="80101"/>
             </a:xfrm>
             <a:prstGeom prst="rect">
@@ -5025,7 +5007,7 @@
           </p:nvSpPr>
           <p:spPr>
             <a:xfrm>
-              <a:off x="8179802" y="5785772"/>
+              <a:off x="8172329" y="5785772"/>
               <a:ext cx="124358" cy="80101"/>
             </a:xfrm>
             <a:prstGeom prst="rect">
@@ -5196,7 +5178,7 @@
                   <a:latin typeface="Helvetica"/>
                   <a:cs typeface="Helvetica"/>
                 </a:rPr>
-                <a:t>subHR per 10 mL/min decline: 1.12 (0.91-1.37), p_Bonf = 1.000 (n = 6)  |  per IQR decline (Δ = 24.2): 1.31 (0.80-2.14)  |  IQR: [-13.0, 11.2]</a:t>
+                <a:t>subHR per 10 mL/min decline: 1.13 (0.92-1.39), p_Bonf = 1.000 (n = 6)  |  per IQR decline (Δ = 23.9): 1.34 (0.82-2.20)  |  IQR: [-12.7, 11.2]</a:t>
               </a:r>
             </a:p>
           </p:txBody>
